--- a/ВКР_Татаров.pptx
+++ b/ВКР_Татаров.pptx
@@ -5,26 +5,29 @@
     <p:sldMasterId id="2147483648" r:id="rId1"/>
   </p:sldMasterIdLst>
   <p:notesMasterIdLst>
-    <p:notesMasterId r:id="rId19"/>
+    <p:notesMasterId r:id="rId22"/>
   </p:notesMasterIdLst>
   <p:sldIdLst>
     <p:sldId id="259" r:id="rId2"/>
     <p:sldId id="257" r:id="rId3"/>
     <p:sldId id="260" r:id="rId4"/>
     <p:sldId id="261" r:id="rId5"/>
-    <p:sldId id="262" r:id="rId6"/>
-    <p:sldId id="263" r:id="rId7"/>
-    <p:sldId id="264" r:id="rId8"/>
-    <p:sldId id="265" r:id="rId9"/>
-    <p:sldId id="266" r:id="rId10"/>
-    <p:sldId id="267" r:id="rId11"/>
-    <p:sldId id="268" r:id="rId12"/>
-    <p:sldId id="269" r:id="rId13"/>
-    <p:sldId id="270" r:id="rId14"/>
-    <p:sldId id="271" r:id="rId15"/>
-    <p:sldId id="272" r:id="rId16"/>
-    <p:sldId id="273" r:id="rId17"/>
-    <p:sldId id="274" r:id="rId18"/>
+    <p:sldId id="275" r:id="rId6"/>
+    <p:sldId id="262" r:id="rId7"/>
+    <p:sldId id="263" r:id="rId8"/>
+    <p:sldId id="264" r:id="rId9"/>
+    <p:sldId id="265" r:id="rId10"/>
+    <p:sldId id="276" r:id="rId11"/>
+    <p:sldId id="277" r:id="rId12"/>
+    <p:sldId id="266" r:id="rId13"/>
+    <p:sldId id="267" r:id="rId14"/>
+    <p:sldId id="268" r:id="rId15"/>
+    <p:sldId id="269" r:id="rId16"/>
+    <p:sldId id="270" r:id="rId17"/>
+    <p:sldId id="271" r:id="rId18"/>
+    <p:sldId id="272" r:id="rId19"/>
+    <p:sldId id="273" r:id="rId20"/>
+    <p:sldId id="274" r:id="rId21"/>
   </p:sldIdLst>
   <p:sldSz cx="9144000" cy="5143500" type="screen16x9"/>
   <p:notesSz cx="6858000" cy="9144000"/>
@@ -126,6 +129,261 @@
 </p:presentation>
 </file>
 
+<file path=ppt/charts/chart1.xml><?xml version="1.0" encoding="utf-8"?>
+<c:chartSpace xmlns:c="http://schemas.openxmlformats.org/drawingml/2006/chart" xmlns:a="http://schemas.openxmlformats.org/drawingml/2006/main" xmlns:r="http://schemas.openxmlformats.org/officeDocument/2006/relationships">
+  <c:lang val="ru-RU"/>
+  <c:chart>
+    <c:plotArea>
+      <c:layout/>
+      <c:scatterChart>
+        <c:scatterStyle val="smoothMarker"/>
+        <c:ser>
+          <c:idx val="0"/>
+          <c:order val="0"/>
+          <c:xVal>
+            <c:numRef>
+              <c:f>Лист1!$A$1:$A$25</c:f>
+              <c:numCache>
+                <c:formatCode>General</c:formatCode>
+                <c:ptCount val="25"/>
+                <c:pt idx="0">
+                  <c:v>1</c:v>
+                </c:pt>
+                <c:pt idx="1">
+                  <c:v>2</c:v>
+                </c:pt>
+                <c:pt idx="2">
+                  <c:v>3</c:v>
+                </c:pt>
+                <c:pt idx="3">
+                  <c:v>4</c:v>
+                </c:pt>
+                <c:pt idx="4">
+                  <c:v>5</c:v>
+                </c:pt>
+                <c:pt idx="5">
+                  <c:v>6</c:v>
+                </c:pt>
+                <c:pt idx="6">
+                  <c:v>7</c:v>
+                </c:pt>
+                <c:pt idx="7">
+                  <c:v>8</c:v>
+                </c:pt>
+                <c:pt idx="8">
+                  <c:v>9</c:v>
+                </c:pt>
+                <c:pt idx="9">
+                  <c:v>10</c:v>
+                </c:pt>
+                <c:pt idx="10">
+                  <c:v>11</c:v>
+                </c:pt>
+                <c:pt idx="11">
+                  <c:v>12</c:v>
+                </c:pt>
+                <c:pt idx="12">
+                  <c:v>13</c:v>
+                </c:pt>
+                <c:pt idx="13">
+                  <c:v>14</c:v>
+                </c:pt>
+                <c:pt idx="14">
+                  <c:v>15</c:v>
+                </c:pt>
+                <c:pt idx="15">
+                  <c:v>16</c:v>
+                </c:pt>
+                <c:pt idx="16">
+                  <c:v>17</c:v>
+                </c:pt>
+                <c:pt idx="17">
+                  <c:v>18</c:v>
+                </c:pt>
+                <c:pt idx="18">
+                  <c:v>19</c:v>
+                </c:pt>
+                <c:pt idx="19">
+                  <c:v>20</c:v>
+                </c:pt>
+                <c:pt idx="20">
+                  <c:v>21</c:v>
+                </c:pt>
+                <c:pt idx="21">
+                  <c:v>22</c:v>
+                </c:pt>
+                <c:pt idx="22">
+                  <c:v>23</c:v>
+                </c:pt>
+                <c:pt idx="23">
+                  <c:v>24</c:v>
+                </c:pt>
+                <c:pt idx="24">
+                  <c:v>25</c:v>
+                </c:pt>
+              </c:numCache>
+            </c:numRef>
+          </c:xVal>
+          <c:yVal>
+            <c:numRef>
+              <c:f>Лист1!$B$1:$B$25</c:f>
+              <c:numCache>
+                <c:formatCode>General</c:formatCode>
+                <c:ptCount val="25"/>
+                <c:pt idx="0">
+                  <c:v>2.78</c:v>
+                </c:pt>
+                <c:pt idx="1">
+                  <c:v>2.7</c:v>
+                </c:pt>
+                <c:pt idx="2">
+                  <c:v>2.6</c:v>
+                </c:pt>
+                <c:pt idx="3">
+                  <c:v>2.44</c:v>
+                </c:pt>
+                <c:pt idx="4">
+                  <c:v>2.2799999999999998</c:v>
+                </c:pt>
+                <c:pt idx="5">
+                  <c:v>2.1</c:v>
+                </c:pt>
+                <c:pt idx="6">
+                  <c:v>1.9</c:v>
+                </c:pt>
+                <c:pt idx="7">
+                  <c:v>1.72</c:v>
+                </c:pt>
+                <c:pt idx="8">
+                  <c:v>1.54</c:v>
+                </c:pt>
+                <c:pt idx="9">
+                  <c:v>1.36</c:v>
+                </c:pt>
+                <c:pt idx="10">
+                  <c:v>1.2</c:v>
+                </c:pt>
+                <c:pt idx="11">
+                  <c:v>1.06</c:v>
+                </c:pt>
+                <c:pt idx="12">
+                  <c:v>0.94</c:v>
+                </c:pt>
+                <c:pt idx="13">
+                  <c:v>0.82</c:v>
+                </c:pt>
+                <c:pt idx="14">
+                  <c:v>0.72</c:v>
+                </c:pt>
+                <c:pt idx="15">
+                  <c:v>0.62</c:v>
+                </c:pt>
+                <c:pt idx="16">
+                  <c:v>0.55000000000000004</c:v>
+                </c:pt>
+                <c:pt idx="17">
+                  <c:v>0.48</c:v>
+                </c:pt>
+                <c:pt idx="18">
+                  <c:v>0.42</c:v>
+                </c:pt>
+                <c:pt idx="19">
+                  <c:v>0.38</c:v>
+                </c:pt>
+                <c:pt idx="20">
+                  <c:v>0.34</c:v>
+                </c:pt>
+                <c:pt idx="21">
+                  <c:v>0.3</c:v>
+                </c:pt>
+                <c:pt idx="22">
+                  <c:v>0.26</c:v>
+                </c:pt>
+                <c:pt idx="23">
+                  <c:v>0.22</c:v>
+                </c:pt>
+                <c:pt idx="24">
+                  <c:v>0.2</c:v>
+                </c:pt>
+              </c:numCache>
+            </c:numRef>
+          </c:yVal>
+          <c:smooth val="1"/>
+        </c:ser>
+        <c:axId val="104635392"/>
+        <c:axId val="115413760"/>
+      </c:scatterChart>
+      <c:valAx>
+        <c:axId val="104635392"/>
+        <c:scaling>
+          <c:orientation val="minMax"/>
+        </c:scaling>
+        <c:axPos val="b"/>
+        <c:majorGridlines/>
+        <c:minorGridlines/>
+        <c:title>
+          <c:tx>
+            <c:rich>
+              <a:bodyPr/>
+              <a:lstStyle/>
+              <a:p>
+                <a:pPr>
+                  <a:defRPr/>
+                </a:pPr>
+                <a:r>
+                  <a:rPr lang="ru-RU"/>
+                  <a:t>Частота, кГц</a:t>
+                </a:r>
+              </a:p>
+            </c:rich>
+          </c:tx>
+          <c:layout/>
+        </c:title>
+        <c:numFmt formatCode="General" sourceLinked="1"/>
+        <c:tickLblPos val="nextTo"/>
+        <c:crossAx val="115413760"/>
+        <c:crosses val="autoZero"/>
+        <c:crossBetween val="midCat"/>
+      </c:valAx>
+      <c:valAx>
+        <c:axId val="115413760"/>
+        <c:scaling>
+          <c:orientation val="minMax"/>
+        </c:scaling>
+        <c:axPos val="l"/>
+        <c:majorGridlines/>
+        <c:minorGridlines/>
+        <c:title>
+          <c:tx>
+            <c:rich>
+              <a:bodyPr/>
+              <a:lstStyle/>
+              <a:p>
+                <a:pPr>
+                  <a:defRPr/>
+                </a:pPr>
+                <a:r>
+                  <a:rPr lang="ru-RU"/>
+                  <a:t>Амплитуда, В</a:t>
+                </a:r>
+              </a:p>
+            </c:rich>
+          </c:tx>
+          <c:layout/>
+        </c:title>
+        <c:numFmt formatCode="General" sourceLinked="1"/>
+        <c:tickLblPos val="nextTo"/>
+        <c:crossAx val="104635392"/>
+        <c:crosses val="autoZero"/>
+        <c:crossBetween val="midCat"/>
+      </c:valAx>
+    </c:plotArea>
+    <c:plotVisOnly val="1"/>
+  </c:chart>
+  <c:externalData r:id="rId1"/>
+</c:chartSpace>
+</file>
+
 <file path=ppt/notesMasters/notesMaster1.xml><?xml version="1.0" encoding="utf-8"?>
 <p:notesMaster xmlns:a="http://schemas.openxmlformats.org/drawingml/2006/main" xmlns:r="http://schemas.openxmlformats.org/officeDocument/2006/relationships" xmlns:p="http://schemas.openxmlformats.org/presentationml/2006/main">
   <p:cSld>
@@ -208,7 +466,8 @@
           <a:p>
             <a:fld id="{A87D7AB4-4A43-46F4-A7FC-6171EB4BF005}" type="datetimeFigureOut">
               <a:rPr lang="ru-RU" smtClean="0"/>
-              <a:t>10.06.2026</a:t>
+              <a:pPr/>
+              <a:t>18.06.2026</a:t>
             </a:fld>
             <a:endParaRPr lang="ru-RU"/>
           </a:p>
@@ -369,6 +628,7 @@
           <a:p>
             <a:fld id="{4A105D3B-A9B2-463B-B1C2-D2E22EE7907E}" type="slidenum">
               <a:rPr lang="ru-RU" smtClean="0"/>
+              <a:pPr/>
               <a:t>‹#›</a:t>
             </a:fld>
             <a:endParaRPr lang="ru-RU"/>
@@ -654,7 +914,8 @@
           <a:p>
             <a:fld id="{1B20B996-EBC6-4482-81E4-0AAE73940B74}" type="datetime1">
               <a:rPr lang="en-US" smtClean="0"/>
-              <a:t>6/10/2026</a:t>
+              <a:pPr/>
+              <a:t>6/18/2026</a:t>
             </a:fld>
             <a:endParaRPr lang="en-US"/>
           </a:p>
@@ -820,7 +1081,8 @@
           <a:p>
             <a:fld id="{2A0F14E4-1533-485A-AAF3-8D8176B18AB9}" type="datetime1">
               <a:rPr lang="en-US" smtClean="0"/>
-              <a:t>6/10/2026</a:t>
+              <a:pPr/>
+              <a:t>6/18/2026</a:t>
             </a:fld>
             <a:endParaRPr lang="en-US"/>
           </a:p>
@@ -996,7 +1258,8 @@
           <a:p>
             <a:fld id="{51C35334-3BA5-4CE1-962C-A151675F0045}" type="datetime1">
               <a:rPr lang="en-US" smtClean="0"/>
-              <a:t>6/10/2026</a:t>
+              <a:pPr/>
+              <a:t>6/18/2026</a:t>
             </a:fld>
             <a:endParaRPr lang="en-US"/>
           </a:p>
@@ -1162,7 +1425,8 @@
           <a:p>
             <a:fld id="{DDC72C1A-5886-4C2D-92C5-483BF3D786AD}" type="datetime1">
               <a:rPr lang="en-US" smtClean="0"/>
-              <a:t>6/10/2026</a:t>
+              <a:pPr/>
+              <a:t>6/18/2026</a:t>
             </a:fld>
             <a:endParaRPr lang="en-US"/>
           </a:p>
@@ -1404,7 +1668,8 @@
           <a:p>
             <a:fld id="{FA704728-630F-4D71-B044-211B549082D7}" type="datetime1">
               <a:rPr lang="en-US" smtClean="0"/>
-              <a:t>6/10/2026</a:t>
+              <a:pPr/>
+              <a:t>6/18/2026</a:t>
             </a:fld>
             <a:endParaRPr lang="en-US"/>
           </a:p>
@@ -1688,7 +1953,8 @@
           <a:p>
             <a:fld id="{75C4F268-C422-45A6-9600-0F8D70D808BA}" type="datetime1">
               <a:rPr lang="en-US" smtClean="0"/>
-              <a:t>6/10/2026</a:t>
+              <a:pPr/>
+              <a:t>6/18/2026</a:t>
             </a:fld>
             <a:endParaRPr lang="en-US"/>
           </a:p>
@@ -2106,7 +2372,8 @@
           <a:p>
             <a:fld id="{C168725A-271E-4D5A-A859-27C05D6C0200}" type="datetime1">
               <a:rPr lang="en-US" smtClean="0"/>
-              <a:t>6/10/2026</a:t>
+              <a:pPr/>
+              <a:t>6/18/2026</a:t>
             </a:fld>
             <a:endParaRPr lang="en-US"/>
           </a:p>
@@ -2220,7 +2487,8 @@
           <a:p>
             <a:fld id="{7C58E90B-6A24-4594-8927-E4FF55F26476}" type="datetime1">
               <a:rPr lang="en-US" smtClean="0"/>
-              <a:t>6/10/2026</a:t>
+              <a:pPr/>
+              <a:t>6/18/2026</a:t>
             </a:fld>
             <a:endParaRPr lang="en-US"/>
           </a:p>
@@ -2311,7 +2579,8 @@
           <a:p>
             <a:fld id="{5283B1E7-899F-4C8B-956C-B5DB593DE659}" type="datetime1">
               <a:rPr lang="en-US" smtClean="0"/>
-              <a:t>6/10/2026</a:t>
+              <a:pPr/>
+              <a:t>6/18/2026</a:t>
             </a:fld>
             <a:endParaRPr lang="en-US"/>
           </a:p>
@@ -2584,7 +2853,8 @@
           <a:p>
             <a:fld id="{C0D9C811-41B1-4EA5-BF77-68D869C00835}" type="datetime1">
               <a:rPr lang="en-US" smtClean="0"/>
-              <a:t>6/10/2026</a:t>
+              <a:pPr/>
+              <a:t>6/18/2026</a:t>
             </a:fld>
             <a:endParaRPr lang="en-US"/>
           </a:p>
@@ -2833,7 +3103,8 @@
           <a:p>
             <a:fld id="{4BABD7EB-0745-47D8-BE59-02D92764FF2D}" type="datetime1">
               <a:rPr lang="en-US" smtClean="0"/>
-              <a:t>6/10/2026</a:t>
+              <a:pPr/>
+              <a:t>6/18/2026</a:t>
             </a:fld>
             <a:endParaRPr lang="en-US"/>
           </a:p>
@@ -3042,7 +3313,8 @@
           <a:p>
             <a:fld id="{7D778742-5338-42D0-BF12-07693AC36925}" type="datetime1">
               <a:rPr lang="en-US" smtClean="0"/>
-              <a:t>6/10/2026</a:t>
+              <a:pPr/>
+              <a:t>6/18/2026</a:t>
             </a:fld>
             <a:endParaRPr lang="en-US"/>
           </a:p>
@@ -3419,7 +3691,7 @@
           <p:cNvPr id="4" name="TextBox 3">
             <a:extLst>
               <a:ext uri="{FF2B5EF4-FFF2-40B4-BE49-F238E27FC236}">
-                <a16:creationId xmlns="" xmlns:a16="http://schemas.microsoft.com/office/drawing/2014/main" id="{15DDC01C-B001-6673-0C5C-13278F22739D}"/>
+                <a16:creationId xmlns:a16="http://schemas.microsoft.com/office/drawing/2014/main" xmlns="" id="{15DDC01C-B001-6673-0C5C-13278F22739D}"/>
               </a:ext>
             </a:extLst>
           </p:cNvPr>
@@ -3518,7 +3790,7 @@
           <p:cNvPr id="6" name="Подзаголовок 2">
             <a:extLst>
               <a:ext uri="{FF2B5EF4-FFF2-40B4-BE49-F238E27FC236}">
-                <a16:creationId xmlns="" xmlns:a16="http://schemas.microsoft.com/office/drawing/2014/main" id="{BCADD4A3-953B-218C-D041-2ADACEFBC7B5}"/>
+                <a16:creationId xmlns:a16="http://schemas.microsoft.com/office/drawing/2014/main" xmlns="" id="{BCADD4A3-953B-218C-D041-2ADACEFBC7B5}"/>
               </a:ext>
             </a:extLst>
           </p:cNvPr>
@@ -3818,7 +4090,7 @@
           <p:cNvPr id="7" name="Рисунок 6">
             <a:extLst>
               <a:ext uri="{FF2B5EF4-FFF2-40B4-BE49-F238E27FC236}">
-                <a16:creationId xmlns="" xmlns:a16="http://schemas.microsoft.com/office/drawing/2014/main" id="{14590EFD-E088-0228-3064-767C72979478}"/>
+                <a16:creationId xmlns:a16="http://schemas.microsoft.com/office/drawing/2014/main" xmlns="" id="{14590EFD-E088-0228-3064-767C72979478}"/>
               </a:ext>
             </a:extLst>
           </p:cNvPr>
@@ -3848,7 +4120,7 @@
           <p:cNvPr id="8" name="Рисунок 7">
             <a:extLst>
               <a:ext uri="{FF2B5EF4-FFF2-40B4-BE49-F238E27FC236}">
-                <a16:creationId xmlns="" xmlns:a16="http://schemas.microsoft.com/office/drawing/2014/main" id="{4B792C90-B297-44D9-4E7C-6225A758FB79}"/>
+                <a16:creationId xmlns:a16="http://schemas.microsoft.com/office/drawing/2014/main" xmlns="" id="{4B792C90-B297-44D9-4E7C-6225A758FB79}"/>
               </a:ext>
             </a:extLst>
           </p:cNvPr>
@@ -3878,7 +4150,7 @@
           <p:cNvPr id="10" name="TextBox 9">
             <a:extLst>
               <a:ext uri="{FF2B5EF4-FFF2-40B4-BE49-F238E27FC236}">
-                <a16:creationId xmlns="" xmlns:a16="http://schemas.microsoft.com/office/drawing/2014/main" id="{9CE3B7DD-8A73-1FC4-D0D2-CCA5DEB2F3DB}"/>
+                <a16:creationId xmlns:a16="http://schemas.microsoft.com/office/drawing/2014/main" xmlns="" id="{9CE3B7DD-8A73-1FC4-D0D2-CCA5DEB2F3DB}"/>
               </a:ext>
             </a:extLst>
           </p:cNvPr>
@@ -3935,7 +4207,7 @@
           <p:cNvPr id="14" name="TextBox 13">
             <a:extLst>
               <a:ext uri="{FF2B5EF4-FFF2-40B4-BE49-F238E27FC236}">
-                <a16:creationId xmlns="" xmlns:a16="http://schemas.microsoft.com/office/drawing/2014/main" id="{491E8A82-8633-1639-4930-EC2418172FC0}"/>
+                <a16:creationId xmlns:a16="http://schemas.microsoft.com/office/drawing/2014/main" xmlns="" id="{491E8A82-8633-1639-4930-EC2418172FC0}"/>
               </a:ext>
             </a:extLst>
           </p:cNvPr>
@@ -4111,7 +4383,7 @@
     </p:spTree>
     <p:extLst>
       <p:ext uri="{BB962C8B-B14F-4D97-AF65-F5344CB8AC3E}">
-        <p14:creationId xmlns="" xmlns:p14="http://schemas.microsoft.com/office/powerpoint/2010/main" val="631386436"/>
+        <p14:creationId xmlns:p14="http://schemas.microsoft.com/office/powerpoint/2010/main" xmlns="" val="631386436"/>
       </p:ext>
     </p:extLst>
   </p:cSld>
@@ -4194,13 +4466,11 @@
       </p:sp>
       <p:pic>
         <p:nvPicPr>
-          <p:cNvPr id="1026" name="Picture 2" descr="C:\Users\Данил\Desktop\ДИПЛОМ 2026\Без имени.png"/>
+          <p:cNvPr id="32771" name="Picture 3"/>
           <p:cNvPicPr>
-            <a:picLocks noGrp="1" noChangeAspect="1" noChangeArrowheads="1"/>
+            <a:picLocks noChangeAspect="1" noChangeArrowheads="1"/>
           </p:cNvPicPr>
-          <p:nvPr>
-            <p:ph idx="1"/>
-          </p:nvPr>
+          <p:nvPr/>
         </p:nvPicPr>
         <p:blipFill>
           <a:blip r:embed="rId2"/>
@@ -4211,31 +4481,38 @@
         </p:blipFill>
         <p:spPr bwMode="auto">
           <a:xfrm>
-            <a:off x="1344977" y="1047750"/>
-            <a:ext cx="6454046" cy="3394075"/>
+            <a:off x="1005775" y="1073252"/>
+            <a:ext cx="7147625" cy="2870097"/>
+          </a:xfrm>
+          <a:prstGeom prst="rect">
+            <a:avLst/>
+          </a:prstGeom>
+          <a:noFill/>
+          <a:ln w="9525">
+            <a:noFill/>
+            <a:miter lim="800000"/>
+            <a:headEnd/>
+            <a:tailEnd/>
+          </a:ln>
+          <a:effectLst/>
+        </p:spPr>
+      </p:pic>
+      <p:sp>
+        <p:nvSpPr>
+          <p:cNvPr id="7" name="TextBox 6"/>
+          <p:cNvSpPr txBox="1"/>
+          <p:nvPr/>
+        </p:nvSpPr>
+        <p:spPr>
+          <a:xfrm>
+            <a:off x="2133600" y="4248150"/>
+            <a:ext cx="4864922" cy="369332"/>
           </a:xfrm>
           <a:prstGeom prst="rect">
             <a:avLst/>
           </a:prstGeom>
           <a:noFill/>
         </p:spPr>
-      </p:pic>
-      <p:sp>
-        <p:nvSpPr>
-          <p:cNvPr id="6" name="TextBox 5"/>
-          <p:cNvSpPr txBox="1"/>
-          <p:nvPr/>
-        </p:nvSpPr>
-        <p:spPr>
-          <a:xfrm>
-            <a:off x="2743200" y="4476750"/>
-            <a:ext cx="2996654" cy="369332"/>
-          </a:xfrm>
-          <a:prstGeom prst="rect">
-            <a:avLst/>
-          </a:prstGeom>
-          <a:noFill/>
-        </p:spPr>
         <p:txBody>
           <a:bodyPr wrap="none" rtlCol="0">
             <a:spAutoFit/>
@@ -4244,7 +4521,23 @@
           <a:p>
             <a:r>
               <a:rPr lang="ru-RU" dirty="0" smtClean="0"/>
-              <a:t>Итоговая схема передатчика</a:t>
+              <a:t>Схема усилителя</a:t>
+            </a:r>
+            <a:r>
+              <a:rPr lang="en-US" dirty="0" smtClean="0"/>
+              <a:t> </a:t>
+            </a:r>
+            <a:r>
+              <a:rPr lang="ru-RU" dirty="0" smtClean="0"/>
+              <a:t>и ФНЧ в программе </a:t>
+            </a:r>
+            <a:r>
+              <a:rPr lang="en-US" dirty="0" err="1" smtClean="0"/>
+              <a:t>Simule</a:t>
+            </a:r>
+            <a:r>
+              <a:rPr lang="en-US" dirty="0" smtClean="0"/>
+              <a:t> IDE</a:t>
             </a:r>
             <a:endParaRPr lang="ru-RU" dirty="0"/>
           </a:p>
@@ -4300,79 +4593,6 @@
       </p:sp>
       <p:sp>
         <p:nvSpPr>
-          <p:cNvPr id="3" name="Содержимое 2"/>
-          <p:cNvSpPr>
-            <a:spLocks noGrp="1"/>
-          </p:cNvSpPr>
-          <p:nvPr>
-            <p:ph idx="1"/>
-          </p:nvPr>
-        </p:nvSpPr>
-        <p:spPr/>
-        <p:txBody>
-          <a:bodyPr>
-            <a:normAutofit fontScale="92500" lnSpcReduction="10000"/>
-          </a:bodyPr>
-          <a:lstStyle/>
-          <a:p>
-            <a:r>
-              <a:rPr lang="ru-RU" dirty="0" smtClean="0"/>
-              <a:t>Поскольку микроконтроллер </a:t>
-            </a:r>
-            <a:r>
-              <a:rPr lang="en-US" dirty="0" smtClean="0"/>
-              <a:t>STM</a:t>
-            </a:r>
-            <a:r>
-              <a:rPr lang="ru-RU" dirty="0" smtClean="0"/>
-              <a:t>32</a:t>
-            </a:r>
-            <a:r>
-              <a:rPr lang="en-US" dirty="0" smtClean="0"/>
-              <a:t>F</a:t>
-            </a:r>
-            <a:r>
-              <a:rPr lang="ru-RU" dirty="0" smtClean="0"/>
-              <a:t>103</a:t>
-            </a:r>
-            <a:r>
-              <a:rPr lang="en-US" dirty="0" smtClean="0"/>
-              <a:t>C</a:t>
-            </a:r>
-            <a:r>
-              <a:rPr lang="ru-RU" dirty="0" smtClean="0"/>
-              <a:t>8</a:t>
-            </a:r>
-            <a:r>
-              <a:rPr lang="en-US" dirty="0" smtClean="0"/>
-              <a:t>T</a:t>
-            </a:r>
-            <a:r>
-              <a:rPr lang="ru-RU" dirty="0" smtClean="0"/>
-              <a:t>6 не имеет встроенного цифро-аналогового преобразователя, принимаемый цифровой сигнал будем обрабатывать в виде </a:t>
-            </a:r>
-            <a:r>
-              <a:rPr lang="ru-RU" dirty="0" err="1" smtClean="0"/>
-              <a:t>ШИМ-сигнала</a:t>
-            </a:r>
-            <a:r>
-              <a:rPr lang="ru-RU" dirty="0" smtClean="0"/>
-              <a:t> с частотой ~47 кГц. Для этого следует использовать ФНЧ с частотой среза 7,2 кГц, чтобы подавить постоянную составляющую </a:t>
-            </a:r>
-            <a:r>
-              <a:rPr lang="ru-RU" dirty="0" err="1" smtClean="0"/>
-              <a:t>ШИМ-сигнала</a:t>
-            </a:r>
-            <a:r>
-              <a:rPr lang="ru-RU" dirty="0" smtClean="0"/>
-              <a:t>. </a:t>
-            </a:r>
-            <a:endParaRPr lang="ru-RU" dirty="0"/>
-          </a:p>
-        </p:txBody>
-      </p:sp>
-      <p:sp>
-        <p:nvSpPr>
           <p:cNvPr id="4" name="Номер слайда 3"/>
           <p:cNvSpPr>
             <a:spLocks noGrp="1"/>
@@ -4392,6 +4612,56 @@
               <a:t>11</a:t>
             </a:fld>
             <a:endParaRPr lang="en-US"/>
+          </a:p>
+        </p:txBody>
+      </p:sp>
+      <p:graphicFrame>
+        <p:nvGraphicFramePr>
+          <p:cNvPr id="5" name="Содержимое 4"/>
+          <p:cNvGraphicFramePr>
+            <a:graphicFrameLocks noGrp="1"/>
+          </p:cNvGraphicFramePr>
+          <p:nvPr>
+            <p:ph idx="1"/>
+          </p:nvPr>
+        </p:nvGraphicFramePr>
+        <p:xfrm>
+          <a:off x="838200" y="1047750"/>
+          <a:ext cx="7391400" cy="3394075"/>
+        </p:xfrm>
+        <a:graphic>
+          <a:graphicData uri="http://schemas.openxmlformats.org/drawingml/2006/chart">
+            <c:chart xmlns:c="http://schemas.openxmlformats.org/drawingml/2006/chart" xmlns:r="http://schemas.openxmlformats.org/officeDocument/2006/relationships" r:id="rId2"/>
+          </a:graphicData>
+        </a:graphic>
+      </p:graphicFrame>
+      <p:sp>
+        <p:nvSpPr>
+          <p:cNvPr id="6" name="TextBox 5"/>
+          <p:cNvSpPr txBox="1"/>
+          <p:nvPr/>
+        </p:nvSpPr>
+        <p:spPr>
+          <a:xfrm>
+            <a:off x="4191000" y="4400550"/>
+            <a:ext cx="1412631" cy="369332"/>
+          </a:xfrm>
+          <a:prstGeom prst="rect">
+            <a:avLst/>
+          </a:prstGeom>
+          <a:noFill/>
+        </p:spPr>
+        <p:txBody>
+          <a:bodyPr wrap="none" rtlCol="0">
+            <a:spAutoFit/>
+          </a:bodyPr>
+          <a:lstStyle/>
+          <a:p>
+            <a:r>
+              <a:rPr lang="ru-RU" dirty="0" smtClean="0"/>
+              <a:t>АЧХ фильтра</a:t>
+            </a:r>
+            <a:endParaRPr lang="ru-RU" dirty="0"/>
           </a:p>
         </p:txBody>
       </p:sp>
@@ -4445,6 +4715,33 @@
       </p:sp>
       <p:sp>
         <p:nvSpPr>
+          <p:cNvPr id="3" name="Содержимое 2"/>
+          <p:cNvSpPr>
+            <a:spLocks noGrp="1"/>
+          </p:cNvSpPr>
+          <p:nvPr>
+            <p:ph idx="1"/>
+          </p:nvPr>
+        </p:nvSpPr>
+        <p:spPr/>
+        <p:txBody>
+          <a:bodyPr/>
+          <a:lstStyle/>
+          <a:p>
+            <a:r>
+              <a:rPr lang="ru-RU" dirty="0" smtClean="0"/>
+              <a:t>Передача данных между микроконтроллером и радио модулем происходит по интерфейсу </a:t>
+            </a:r>
+            <a:r>
+              <a:rPr lang="en-US" dirty="0" smtClean="0"/>
+              <a:t>SPI.</a:t>
+            </a:r>
+            <a:endParaRPr lang="ru-RU" dirty="0"/>
+          </a:p>
+        </p:txBody>
+      </p:sp>
+      <p:sp>
+        <p:nvSpPr>
           <p:cNvPr id="4" name="Номер слайда 3"/>
           <p:cNvSpPr>
             <a:spLocks noGrp="1"/>
@@ -4462,6 +4759,378 @@
               <a:rPr lang="en-US" smtClean="0"/>
               <a:pPr/>
               <a:t>12</a:t>
+            </a:fld>
+            <a:endParaRPr lang="en-US"/>
+          </a:p>
+        </p:txBody>
+      </p:sp>
+    </p:spTree>
+  </p:cSld>
+  <p:clrMapOvr>
+    <a:masterClrMapping/>
+  </p:clrMapOvr>
+  <p:timing>
+    <p:tnLst>
+      <p:par>
+        <p:cTn id="1" dur="indefinite" restart="never" nodeType="tmRoot"/>
+      </p:par>
+    </p:tnLst>
+  </p:timing>
+</p:sld>
+</file>
+
+<file path=ppt/slides/slide13.xml><?xml version="1.0" encoding="utf-8"?>
+<p:sld xmlns:a="http://schemas.openxmlformats.org/drawingml/2006/main" xmlns:r="http://schemas.openxmlformats.org/officeDocument/2006/relationships" xmlns:p="http://schemas.openxmlformats.org/presentationml/2006/main">
+  <p:cSld>
+    <p:spTree>
+      <p:nvGrpSpPr>
+        <p:cNvPr id="1" name=""/>
+        <p:cNvGrpSpPr/>
+        <p:nvPr/>
+      </p:nvGrpSpPr>
+      <p:grpSpPr>
+        <a:xfrm>
+          <a:off x="0" y="0"/>
+          <a:ext cx="0" cy="0"/>
+          <a:chOff x="0" y="0"/>
+          <a:chExt cx="0" cy="0"/>
+        </a:xfrm>
+      </p:grpSpPr>
+      <p:sp>
+        <p:nvSpPr>
+          <p:cNvPr id="2" name="Заголовок 1"/>
+          <p:cNvSpPr>
+            <a:spLocks noGrp="1"/>
+          </p:cNvSpPr>
+          <p:nvPr>
+            <p:ph type="title"/>
+          </p:nvPr>
+        </p:nvSpPr>
+        <p:spPr/>
+        <p:txBody>
+          <a:bodyPr/>
+          <a:lstStyle/>
+          <a:p>
+            <a:r>
+              <a:rPr lang="ru-RU" dirty="0" smtClean="0"/>
+              <a:t>Аппаратная часть</a:t>
+            </a:r>
+            <a:endParaRPr lang="ru-RU" dirty="0"/>
+          </a:p>
+        </p:txBody>
+      </p:sp>
+      <p:sp>
+        <p:nvSpPr>
+          <p:cNvPr id="4" name="Номер слайда 3"/>
+          <p:cNvSpPr>
+            <a:spLocks noGrp="1"/>
+          </p:cNvSpPr>
+          <p:nvPr>
+            <p:ph type="sldNum" sz="quarter" idx="12"/>
+          </p:nvPr>
+        </p:nvSpPr>
+        <p:spPr/>
+        <p:txBody>
+          <a:bodyPr/>
+          <a:lstStyle/>
+          <a:p>
+            <a:fld id="{A483448D-3A78-4528-A469-B745A65DA480}" type="slidenum">
+              <a:rPr lang="en-US" smtClean="0"/>
+              <a:pPr/>
+              <a:t>13</a:t>
+            </a:fld>
+            <a:endParaRPr lang="en-US"/>
+          </a:p>
+        </p:txBody>
+      </p:sp>
+      <p:sp>
+        <p:nvSpPr>
+          <p:cNvPr id="6" name="TextBox 5"/>
+          <p:cNvSpPr txBox="1"/>
+          <p:nvPr/>
+        </p:nvSpPr>
+        <p:spPr>
+          <a:xfrm>
+            <a:off x="2590800" y="4476750"/>
+            <a:ext cx="3917804" cy="369332"/>
+          </a:xfrm>
+          <a:prstGeom prst="rect">
+            <a:avLst/>
+          </a:prstGeom>
+          <a:noFill/>
+        </p:spPr>
+        <p:txBody>
+          <a:bodyPr wrap="none" rtlCol="0" anchor="b" anchorCtr="1">
+            <a:spAutoFit/>
+          </a:bodyPr>
+          <a:lstStyle/>
+          <a:p>
+            <a:pPr algn="ctr"/>
+            <a:r>
+              <a:rPr lang="ru-RU" dirty="0" smtClean="0"/>
+              <a:t>Итоговая схема </a:t>
+            </a:r>
+            <a:r>
+              <a:rPr lang="ru-RU" dirty="0" smtClean="0"/>
+              <a:t>передающей стороны</a:t>
+            </a:r>
+            <a:endParaRPr lang="ru-RU" dirty="0"/>
+          </a:p>
+        </p:txBody>
+      </p:sp>
+      <p:pic>
+        <p:nvPicPr>
+          <p:cNvPr id="8" name="Рисунок 7" descr="Без имени.png"/>
+          <p:cNvPicPr/>
+          <p:nvPr/>
+        </p:nvPicPr>
+        <p:blipFill>
+          <a:blip r:embed="rId2"/>
+          <a:stretch>
+            <a:fillRect/>
+          </a:stretch>
+        </p:blipFill>
+        <p:spPr>
+          <a:xfrm>
+            <a:off x="1655298" y="1047750"/>
+            <a:ext cx="6193302" cy="3463748"/>
+          </a:xfrm>
+          <a:prstGeom prst="rect">
+            <a:avLst/>
+          </a:prstGeom>
+        </p:spPr>
+      </p:pic>
+    </p:spTree>
+  </p:cSld>
+  <p:clrMapOvr>
+    <a:masterClrMapping/>
+  </p:clrMapOvr>
+  <p:timing>
+    <p:tnLst>
+      <p:par>
+        <p:cTn id="1" dur="indefinite" restart="never" nodeType="tmRoot"/>
+      </p:par>
+    </p:tnLst>
+  </p:timing>
+</p:sld>
+</file>
+
+<file path=ppt/slides/slide14.xml><?xml version="1.0" encoding="utf-8"?>
+<p:sld xmlns:a="http://schemas.openxmlformats.org/drawingml/2006/main" xmlns:r="http://schemas.openxmlformats.org/officeDocument/2006/relationships" xmlns:p="http://schemas.openxmlformats.org/presentationml/2006/main">
+  <p:cSld>
+    <p:spTree>
+      <p:nvGrpSpPr>
+        <p:cNvPr id="1" name=""/>
+        <p:cNvGrpSpPr/>
+        <p:nvPr/>
+      </p:nvGrpSpPr>
+      <p:grpSpPr>
+        <a:xfrm>
+          <a:off x="0" y="0"/>
+          <a:ext cx="0" cy="0"/>
+          <a:chOff x="0" y="0"/>
+          <a:chExt cx="0" cy="0"/>
+        </a:xfrm>
+      </p:grpSpPr>
+      <p:sp>
+        <p:nvSpPr>
+          <p:cNvPr id="2" name="Заголовок 1"/>
+          <p:cNvSpPr>
+            <a:spLocks noGrp="1"/>
+          </p:cNvSpPr>
+          <p:nvPr>
+            <p:ph type="title"/>
+          </p:nvPr>
+        </p:nvSpPr>
+        <p:spPr/>
+        <p:txBody>
+          <a:bodyPr/>
+          <a:lstStyle/>
+          <a:p>
+            <a:r>
+              <a:rPr lang="ru-RU" dirty="0" smtClean="0"/>
+              <a:t>Аппаратная часть</a:t>
+            </a:r>
+            <a:endParaRPr lang="ru-RU" dirty="0"/>
+          </a:p>
+        </p:txBody>
+      </p:sp>
+      <p:sp>
+        <p:nvSpPr>
+          <p:cNvPr id="3" name="Содержимое 2"/>
+          <p:cNvSpPr>
+            <a:spLocks noGrp="1"/>
+          </p:cNvSpPr>
+          <p:nvPr>
+            <p:ph idx="1"/>
+          </p:nvPr>
+        </p:nvSpPr>
+        <p:spPr/>
+        <p:txBody>
+          <a:bodyPr>
+            <a:normAutofit fontScale="92500" lnSpcReduction="10000"/>
+          </a:bodyPr>
+          <a:lstStyle/>
+          <a:p>
+            <a:pPr algn="just"/>
+            <a:r>
+              <a:rPr lang="ru-RU" dirty="0" smtClean="0"/>
+              <a:t>Поскольку микроконтроллер </a:t>
+            </a:r>
+            <a:r>
+              <a:rPr lang="en-US" dirty="0" smtClean="0"/>
+              <a:t>STM</a:t>
+            </a:r>
+            <a:r>
+              <a:rPr lang="ru-RU" dirty="0" smtClean="0"/>
+              <a:t>32</a:t>
+            </a:r>
+            <a:r>
+              <a:rPr lang="en-US" dirty="0" smtClean="0"/>
+              <a:t>F</a:t>
+            </a:r>
+            <a:r>
+              <a:rPr lang="ru-RU" dirty="0" smtClean="0"/>
+              <a:t>103</a:t>
+            </a:r>
+            <a:r>
+              <a:rPr lang="en-US" dirty="0" smtClean="0"/>
+              <a:t>C</a:t>
+            </a:r>
+            <a:r>
+              <a:rPr lang="ru-RU" dirty="0" smtClean="0"/>
+              <a:t>8</a:t>
+            </a:r>
+            <a:r>
+              <a:rPr lang="en-US" dirty="0" smtClean="0"/>
+              <a:t>T</a:t>
+            </a:r>
+            <a:r>
+              <a:rPr lang="ru-RU" dirty="0" smtClean="0"/>
+              <a:t>6 не имеет встроенного цифро-аналогового преобразователя, принимаемый цифровой сигнал будем обрабатывать в виде </a:t>
+            </a:r>
+            <a:r>
+              <a:rPr lang="ru-RU" dirty="0" err="1" smtClean="0"/>
+              <a:t>ШИМ-сигнала</a:t>
+            </a:r>
+            <a:r>
+              <a:rPr lang="ru-RU" dirty="0" smtClean="0"/>
+              <a:t> с частотой ~47 кГц. Для этого следует использовать ФНЧ с частотой среза 7,2 кГц, чтобы </a:t>
+            </a:r>
+            <a:r>
+              <a:rPr lang="ru-RU" dirty="0" smtClean="0"/>
+              <a:t>сгладить высокую частоту </a:t>
+            </a:r>
+            <a:r>
+              <a:rPr lang="ru-RU" dirty="0" err="1" smtClean="0"/>
+              <a:t>ШИМ-сигнала</a:t>
+            </a:r>
+            <a:r>
+              <a:rPr lang="ru-RU" dirty="0" smtClean="0"/>
+              <a:t>. </a:t>
+            </a:r>
+            <a:endParaRPr lang="ru-RU" dirty="0"/>
+          </a:p>
+        </p:txBody>
+      </p:sp>
+      <p:sp>
+        <p:nvSpPr>
+          <p:cNvPr id="4" name="Номер слайда 3"/>
+          <p:cNvSpPr>
+            <a:spLocks noGrp="1"/>
+          </p:cNvSpPr>
+          <p:nvPr>
+            <p:ph type="sldNum" sz="quarter" idx="12"/>
+          </p:nvPr>
+        </p:nvSpPr>
+        <p:spPr/>
+        <p:txBody>
+          <a:bodyPr/>
+          <a:lstStyle/>
+          <a:p>
+            <a:fld id="{A483448D-3A78-4528-A469-B745A65DA480}" type="slidenum">
+              <a:rPr lang="en-US" smtClean="0"/>
+              <a:pPr/>
+              <a:t>14</a:t>
+            </a:fld>
+            <a:endParaRPr lang="en-US"/>
+          </a:p>
+        </p:txBody>
+      </p:sp>
+    </p:spTree>
+  </p:cSld>
+  <p:clrMapOvr>
+    <a:masterClrMapping/>
+  </p:clrMapOvr>
+  <p:timing>
+    <p:tnLst>
+      <p:par>
+        <p:cTn id="1" dur="indefinite" restart="never" nodeType="tmRoot"/>
+      </p:par>
+    </p:tnLst>
+  </p:timing>
+</p:sld>
+</file>
+
+<file path=ppt/slides/slide15.xml><?xml version="1.0" encoding="utf-8"?>
+<p:sld xmlns:a="http://schemas.openxmlformats.org/drawingml/2006/main" xmlns:r="http://schemas.openxmlformats.org/officeDocument/2006/relationships" xmlns:p="http://schemas.openxmlformats.org/presentationml/2006/main">
+  <p:cSld>
+    <p:spTree>
+      <p:nvGrpSpPr>
+        <p:cNvPr id="1" name=""/>
+        <p:cNvGrpSpPr/>
+        <p:nvPr/>
+      </p:nvGrpSpPr>
+      <p:grpSpPr>
+        <a:xfrm>
+          <a:off x="0" y="0"/>
+          <a:ext cx="0" cy="0"/>
+          <a:chOff x="0" y="0"/>
+          <a:chExt cx="0" cy="0"/>
+        </a:xfrm>
+      </p:grpSpPr>
+      <p:sp>
+        <p:nvSpPr>
+          <p:cNvPr id="2" name="Заголовок 1"/>
+          <p:cNvSpPr>
+            <a:spLocks noGrp="1"/>
+          </p:cNvSpPr>
+          <p:nvPr>
+            <p:ph type="title"/>
+          </p:nvPr>
+        </p:nvSpPr>
+        <p:spPr/>
+        <p:txBody>
+          <a:bodyPr/>
+          <a:lstStyle/>
+          <a:p>
+            <a:r>
+              <a:rPr lang="ru-RU" dirty="0" smtClean="0"/>
+              <a:t>Аппаратная часть</a:t>
+            </a:r>
+            <a:endParaRPr lang="ru-RU" dirty="0"/>
+          </a:p>
+        </p:txBody>
+      </p:sp>
+      <p:sp>
+        <p:nvSpPr>
+          <p:cNvPr id="4" name="Номер слайда 3"/>
+          <p:cNvSpPr>
+            <a:spLocks noGrp="1"/>
+          </p:cNvSpPr>
+          <p:nvPr>
+            <p:ph type="sldNum" sz="quarter" idx="12"/>
+          </p:nvPr>
+        </p:nvSpPr>
+        <p:spPr/>
+        <p:txBody>
+          <a:bodyPr/>
+          <a:lstStyle/>
+          <a:p>
+            <a:fld id="{A483448D-3A78-4528-A469-B745A65DA480}" type="slidenum">
+              <a:rPr lang="en-US" smtClean="0"/>
+              <a:pPr/>
+              <a:t>15</a:t>
             </a:fld>
             <a:endParaRPr lang="en-US"/>
           </a:p>
@@ -4509,8 +5178,8 @@
         </p:nvSpPr>
         <p:spPr>
           <a:xfrm>
-            <a:off x="2819400" y="3943350"/>
-            <a:ext cx="3619452" cy="369332"/>
+            <a:off x="1676400" y="3943350"/>
+            <a:ext cx="5827686" cy="369332"/>
           </a:xfrm>
           <a:prstGeom prst="rect">
             <a:avLst/>
@@ -4525,199 +5194,24 @@
           <a:p>
             <a:r>
               <a:rPr lang="ru-RU" dirty="0" smtClean="0"/>
-              <a:t>ФНЧ на выходе микроконтроллера</a:t>
+              <a:t>ФНЧ с повторителем на ОУ </a:t>
+            </a:r>
+            <a:r>
+              <a:rPr lang="ru-RU" dirty="0" smtClean="0"/>
+              <a:t>на выходе микроконтроллера</a:t>
             </a:r>
             <a:endParaRPr lang="ru-RU" dirty="0"/>
-          </a:p>
-        </p:txBody>
-      </p:sp>
-    </p:spTree>
-  </p:cSld>
-  <p:clrMapOvr>
-    <a:masterClrMapping/>
-  </p:clrMapOvr>
-</p:sld>
-</file>
-
-<file path=ppt/slides/slide13.xml><?xml version="1.0" encoding="utf-8"?>
-<p:sld xmlns:a="http://schemas.openxmlformats.org/drawingml/2006/main" xmlns:r="http://schemas.openxmlformats.org/officeDocument/2006/relationships" xmlns:p="http://schemas.openxmlformats.org/presentationml/2006/main">
-  <p:cSld>
-    <p:spTree>
-      <p:nvGrpSpPr>
-        <p:cNvPr id="1" name=""/>
-        <p:cNvGrpSpPr/>
-        <p:nvPr/>
-      </p:nvGrpSpPr>
-      <p:grpSpPr>
-        <a:xfrm>
-          <a:off x="0" y="0"/>
-          <a:ext cx="0" cy="0"/>
-          <a:chOff x="0" y="0"/>
-          <a:chExt cx="0" cy="0"/>
-        </a:xfrm>
-      </p:grpSpPr>
-      <p:sp>
-        <p:nvSpPr>
-          <p:cNvPr id="2" name="Заголовок 1"/>
-          <p:cNvSpPr>
-            <a:spLocks noGrp="1"/>
-          </p:cNvSpPr>
-          <p:nvPr>
-            <p:ph type="title"/>
-          </p:nvPr>
-        </p:nvSpPr>
-        <p:spPr/>
-        <p:txBody>
-          <a:bodyPr/>
-          <a:lstStyle/>
-          <a:p>
-            <a:r>
-              <a:rPr lang="ru-RU" dirty="0" smtClean="0"/>
-              <a:t>Аппаратная часть</a:t>
-            </a:r>
-            <a:endParaRPr lang="ru-RU" dirty="0"/>
-          </a:p>
-        </p:txBody>
-      </p:sp>
-      <p:sp>
-        <p:nvSpPr>
-          <p:cNvPr id="3" name="Содержимое 2"/>
-          <p:cNvSpPr>
-            <a:spLocks noGrp="1"/>
-          </p:cNvSpPr>
-          <p:nvPr>
-            <p:ph idx="1"/>
-          </p:nvPr>
-        </p:nvSpPr>
-        <p:spPr/>
-        <p:txBody>
-          <a:bodyPr/>
-          <a:lstStyle/>
-          <a:p>
-            <a:r>
-              <a:rPr lang="ru-RU" dirty="0" smtClean="0"/>
-              <a:t>Выходной сигнал необходимо ослабить и снизить среднее значение колебаний до 0 В, чтобы в последующей аппаратуре избежать искажений сигнала за счёт </a:t>
-            </a:r>
-            <a:r>
-              <a:rPr lang="ru-RU" dirty="0" err="1" smtClean="0"/>
-              <a:t>переусиления</a:t>
-            </a:r>
-            <a:r>
-              <a:rPr lang="ru-RU" dirty="0" smtClean="0"/>
-              <a:t>.</a:t>
-            </a:r>
-            <a:endParaRPr lang="ru-RU" dirty="0"/>
-          </a:p>
-        </p:txBody>
-      </p:sp>
-      <p:sp>
-        <p:nvSpPr>
-          <p:cNvPr id="4" name="Номер слайда 3"/>
-          <p:cNvSpPr>
-            <a:spLocks noGrp="1"/>
-          </p:cNvSpPr>
-          <p:nvPr>
-            <p:ph type="sldNum" sz="quarter" idx="12"/>
-          </p:nvPr>
-        </p:nvSpPr>
-        <p:spPr/>
-        <p:txBody>
-          <a:bodyPr/>
-          <a:lstStyle/>
-          <a:p>
-            <a:fld id="{A483448D-3A78-4528-A469-B745A65DA480}" type="slidenum">
-              <a:rPr lang="en-US" smtClean="0"/>
-              <a:pPr/>
-              <a:t>13</a:t>
-            </a:fld>
-            <a:endParaRPr lang="en-US"/>
-          </a:p>
-        </p:txBody>
-      </p:sp>
-    </p:spTree>
-  </p:cSld>
-  <p:clrMapOvr>
-    <a:masterClrMapping/>
-  </p:clrMapOvr>
-</p:sld>
-</file>
-
-<file path=ppt/slides/slide14.xml><?xml version="1.0" encoding="utf-8"?>
-<p:sld xmlns:a="http://schemas.openxmlformats.org/drawingml/2006/main" xmlns:r="http://schemas.openxmlformats.org/officeDocument/2006/relationships" xmlns:p="http://schemas.openxmlformats.org/presentationml/2006/main">
-  <p:cSld>
-    <p:spTree>
-      <p:nvGrpSpPr>
-        <p:cNvPr id="1" name=""/>
-        <p:cNvGrpSpPr/>
-        <p:nvPr/>
-      </p:nvGrpSpPr>
-      <p:grpSpPr>
-        <a:xfrm>
-          <a:off x="0" y="0"/>
-          <a:ext cx="0" cy="0"/>
-          <a:chOff x="0" y="0"/>
-          <a:chExt cx="0" cy="0"/>
-        </a:xfrm>
-      </p:grpSpPr>
-      <p:sp>
-        <p:nvSpPr>
-          <p:cNvPr id="2" name="Заголовок 1"/>
-          <p:cNvSpPr>
-            <a:spLocks noGrp="1"/>
-          </p:cNvSpPr>
-          <p:nvPr>
-            <p:ph type="title"/>
-          </p:nvPr>
-        </p:nvSpPr>
-        <p:spPr/>
-        <p:txBody>
-          <a:bodyPr/>
-          <a:lstStyle/>
-          <a:p>
-            <a:r>
-              <a:rPr lang="ru-RU" dirty="0" smtClean="0"/>
-              <a:t>Аппаратная часть</a:t>
-            </a:r>
-            <a:endParaRPr lang="ru-RU" dirty="0"/>
-          </a:p>
-        </p:txBody>
-      </p:sp>
-      <p:sp>
-        <p:nvSpPr>
-          <p:cNvPr id="4" name="Номер слайда 3"/>
-          <p:cNvSpPr>
-            <a:spLocks noGrp="1"/>
-          </p:cNvSpPr>
-          <p:nvPr>
-            <p:ph type="sldNum" sz="quarter" idx="12"/>
-          </p:nvPr>
-        </p:nvSpPr>
-        <p:spPr/>
-        <p:txBody>
-          <a:bodyPr/>
-          <a:lstStyle/>
-          <a:p>
-            <a:fld id="{A483448D-3A78-4528-A469-B745A65DA480}" type="slidenum">
-              <a:rPr lang="en-US" smtClean="0"/>
-              <a:pPr/>
-              <a:t>14</a:t>
-            </a:fld>
-            <a:endParaRPr lang="en-US"/>
           </a:p>
         </p:txBody>
       </p:sp>
       <p:pic>
         <p:nvPicPr>
-          <p:cNvPr id="2050" name="Picture 2"/>
-          <p:cNvPicPr>
-            <a:picLocks noGrp="1" noChangeAspect="1" noChangeArrowheads="1"/>
-          </p:cNvPicPr>
-          <p:nvPr>
-            <p:ph idx="1"/>
-          </p:nvPr>
+          <p:cNvPr id="7" name="Рисунок 6"/>
+          <p:cNvPicPr/>
+          <p:nvPr/>
         </p:nvPicPr>
         <p:blipFill>
-          <a:blip r:embed="rId2"/>
+          <a:blip r:embed="rId3"/>
           <a:srcRect/>
           <a:stretch>
             <a:fillRect/>
@@ -4725,8 +5219,8 @@
         </p:blipFill>
         <p:spPr bwMode="auto">
           <a:xfrm>
-            <a:off x="2518385" y="1200150"/>
-            <a:ext cx="4111015" cy="2958151"/>
+            <a:off x="1601787" y="1384124"/>
+            <a:ext cx="5940425" cy="2375251"/>
           </a:xfrm>
           <a:prstGeom prst="rect">
             <a:avLst/>
@@ -4738,174 +5232,20 @@
             <a:headEnd/>
             <a:tailEnd/>
           </a:ln>
-          <a:effectLst/>
         </p:spPr>
       </p:pic>
-      <p:sp>
-        <p:nvSpPr>
-          <p:cNvPr id="6" name="TextBox 5"/>
-          <p:cNvSpPr txBox="1"/>
-          <p:nvPr/>
-        </p:nvSpPr>
-        <p:spPr>
-          <a:xfrm>
-            <a:off x="2560876" y="4324350"/>
-            <a:ext cx="4144724" cy="369332"/>
-          </a:xfrm>
-          <a:prstGeom prst="rect">
-            <a:avLst/>
-          </a:prstGeom>
-          <a:noFill/>
-        </p:spPr>
-        <p:txBody>
-          <a:bodyPr wrap="none" rtlCol="0">
-            <a:spAutoFit/>
-          </a:bodyPr>
-          <a:lstStyle/>
-          <a:p>
-            <a:r>
-              <a:rPr lang="ru-RU" dirty="0" smtClean="0"/>
-              <a:t>Схема ослабления и виртуальной земли</a:t>
-            </a:r>
-            <a:endParaRPr lang="ru-RU" dirty="0"/>
-          </a:p>
-        </p:txBody>
-      </p:sp>
     </p:spTree>
   </p:cSld>
   <p:clrMapOvr>
     <a:masterClrMapping/>
   </p:clrMapOvr>
-</p:sld>
-</file>
-
-<file path=ppt/slides/slide15.xml><?xml version="1.0" encoding="utf-8"?>
-<p:sld xmlns:a="http://schemas.openxmlformats.org/drawingml/2006/main" xmlns:r="http://schemas.openxmlformats.org/officeDocument/2006/relationships" xmlns:p="http://schemas.openxmlformats.org/presentationml/2006/main">
-  <p:cSld>
-    <p:spTree>
-      <p:nvGrpSpPr>
-        <p:cNvPr id="1" name=""/>
-        <p:cNvGrpSpPr/>
-        <p:nvPr/>
-      </p:nvGrpSpPr>
-      <p:grpSpPr>
-        <a:xfrm>
-          <a:off x="0" y="0"/>
-          <a:ext cx="0" cy="0"/>
-          <a:chOff x="0" y="0"/>
-          <a:chExt cx="0" cy="0"/>
-        </a:xfrm>
-      </p:grpSpPr>
-      <p:sp>
-        <p:nvSpPr>
-          <p:cNvPr id="2" name="Заголовок 1"/>
-          <p:cNvSpPr>
-            <a:spLocks noGrp="1"/>
-          </p:cNvSpPr>
-          <p:nvPr>
-            <p:ph type="title"/>
-          </p:nvPr>
-        </p:nvSpPr>
-        <p:spPr/>
-        <p:txBody>
-          <a:bodyPr/>
-          <a:lstStyle/>
-          <a:p>
-            <a:r>
-              <a:rPr lang="ru-RU" dirty="0" smtClean="0"/>
-              <a:t>Аппаратная часть</a:t>
-            </a:r>
-            <a:endParaRPr lang="ru-RU" dirty="0"/>
-          </a:p>
-        </p:txBody>
-      </p:sp>
-      <p:sp>
-        <p:nvSpPr>
-          <p:cNvPr id="4" name="Номер слайда 3"/>
-          <p:cNvSpPr>
-            <a:spLocks noGrp="1"/>
-          </p:cNvSpPr>
-          <p:nvPr>
-            <p:ph type="sldNum" sz="quarter" idx="12"/>
-          </p:nvPr>
-        </p:nvSpPr>
-        <p:spPr/>
-        <p:txBody>
-          <a:bodyPr/>
-          <a:lstStyle/>
-          <a:p>
-            <a:fld id="{A483448D-3A78-4528-A469-B745A65DA480}" type="slidenum">
-              <a:rPr lang="en-US" smtClean="0"/>
-              <a:pPr/>
-              <a:t>15</a:t>
-            </a:fld>
-            <a:endParaRPr lang="en-US"/>
-          </a:p>
-        </p:txBody>
-      </p:sp>
-      <p:pic>
-        <p:nvPicPr>
-          <p:cNvPr id="3074" name="Picture 2" descr="C:\Users\Данил\Desktop\ДИПЛОМ 2026\Без имени1.png"/>
-          <p:cNvPicPr>
-            <a:picLocks noGrp="1" noChangeAspect="1" noChangeArrowheads="1"/>
-          </p:cNvPicPr>
-          <p:nvPr>
-            <p:ph idx="1"/>
-          </p:nvPr>
-        </p:nvPicPr>
-        <p:blipFill>
-          <a:blip r:embed="rId2"/>
-          <a:srcRect/>
-          <a:stretch>
-            <a:fillRect/>
-          </a:stretch>
-        </p:blipFill>
-        <p:spPr bwMode="auto">
-          <a:xfrm>
-            <a:off x="1828800" y="1200150"/>
-            <a:ext cx="5486400" cy="2637379"/>
-          </a:xfrm>
-          <a:prstGeom prst="rect">
-            <a:avLst/>
-          </a:prstGeom>
-          <a:noFill/>
-        </p:spPr>
-      </p:pic>
-      <p:sp>
-        <p:nvSpPr>
-          <p:cNvPr id="6" name="TextBox 5"/>
-          <p:cNvSpPr txBox="1"/>
-          <p:nvPr/>
-        </p:nvSpPr>
-        <p:spPr>
-          <a:xfrm>
-            <a:off x="2667000" y="3943350"/>
-            <a:ext cx="3641959" cy="369332"/>
-          </a:xfrm>
-          <a:prstGeom prst="rect">
-            <a:avLst/>
-          </a:prstGeom>
-          <a:noFill/>
-        </p:spPr>
-        <p:txBody>
-          <a:bodyPr wrap="none" rtlCol="0">
-            <a:spAutoFit/>
-          </a:bodyPr>
-          <a:lstStyle/>
-          <a:p>
-            <a:r>
-              <a:rPr lang="ru-RU" dirty="0" smtClean="0"/>
-              <a:t>Итоговая схема приёмной системы</a:t>
-            </a:r>
-            <a:endParaRPr lang="ru-RU" dirty="0"/>
-          </a:p>
-        </p:txBody>
-      </p:sp>
-    </p:spTree>
-  </p:cSld>
-  <p:clrMapOvr>
-    <a:masterClrMapping/>
-  </p:clrMapOvr>
+  <p:timing>
+    <p:tnLst>
+      <p:par>
+        <p:cTn id="1" dur="indefinite" restart="never" nodeType="tmRoot"/>
+      </p:par>
+    </p:tnLst>
+  </p:timing>
 </p:sld>
 </file>
 
@@ -4943,7 +5283,7 @@
           <a:p>
             <a:r>
               <a:rPr lang="ru-RU" dirty="0" smtClean="0"/>
-              <a:t>Программная часть</a:t>
+              <a:t>Аппаратная часть</a:t>
             </a:r>
             <a:endParaRPr lang="ru-RU" dirty="0"/>
           </a:p>
@@ -4961,72 +5301,22 @@
         </p:nvSpPr>
         <p:spPr/>
         <p:txBody>
-          <a:bodyPr>
-            <a:normAutofit lnSpcReduction="10000"/>
-          </a:bodyPr>
-          <a:lstStyle/>
-          <a:p>
+          <a:bodyPr/>
+          <a:lstStyle/>
+          <a:p>
+            <a:pPr algn="just"/>
             <a:r>
               <a:rPr lang="ru-RU" dirty="0" smtClean="0"/>
-              <a:t>Написание программного кода осуществлялось в среде разработки </a:t>
-            </a:r>
-            <a:r>
-              <a:rPr lang="en-US" dirty="0" err="1" smtClean="0"/>
-              <a:t>ArduinoIDE</a:t>
-            </a:r>
-            <a:r>
-              <a:rPr lang="en-US" dirty="0" smtClean="0"/>
-              <a:t> </a:t>
+              <a:t>Выходной сигнал необходимо ослабить и снизить среднее значение колебаний до 0 В, чтобы в последующей аппаратуре избежать искажений сигнала за счёт </a:t>
+            </a:r>
+            <a:r>
+              <a:rPr lang="ru-RU" dirty="0" err="1" smtClean="0"/>
+              <a:t>переусиления</a:t>
             </a:r>
             <a:r>
               <a:rPr lang="ru-RU" dirty="0" smtClean="0"/>
-              <a:t>с использованием библиотек </a:t>
-            </a:r>
-            <a:r>
-              <a:rPr lang="en-US" dirty="0" err="1" smtClean="0"/>
-              <a:t>SPI.h</a:t>
-            </a:r>
-            <a:r>
-              <a:rPr lang="ru-RU" dirty="0" smtClean="0"/>
-              <a:t> и </a:t>
-            </a:r>
-            <a:r>
-              <a:rPr lang="en-US" dirty="0" smtClean="0"/>
-              <a:t>RF24.h</a:t>
-            </a:r>
-            <a:r>
-              <a:rPr lang="ru-RU" dirty="0" smtClean="0"/>
-              <a:t> для работы с радио модулем по интерфейсу </a:t>
-            </a:r>
-            <a:r>
-              <a:rPr lang="en-US" dirty="0" smtClean="0"/>
-              <a:t>SPI</a:t>
-            </a:r>
-            <a:r>
-              <a:rPr lang="ru-RU" dirty="0" smtClean="0"/>
-              <a:t>, а также библиотеки с ресурса </a:t>
-            </a:r>
-            <a:r>
-              <a:rPr lang="en-US" dirty="0" smtClean="0"/>
-              <a:t>STM32duino</a:t>
-            </a:r>
-            <a:r>
-              <a:rPr lang="ru-RU" dirty="0" smtClean="0"/>
-              <a:t> для работы с микроконтроллерами </a:t>
-            </a:r>
-            <a:r>
-              <a:rPr lang="en-US" dirty="0" smtClean="0"/>
-              <a:t>STM32.</a:t>
-            </a:r>
-            <a:endParaRPr lang="en-US" dirty="0" smtClean="0"/>
-          </a:p>
-          <a:p>
-            <a:endParaRPr lang="en-US" dirty="0" smtClean="0"/>
-          </a:p>
-          <a:p>
-            <a:endParaRPr lang="en-US" dirty="0" smtClean="0"/>
-          </a:p>
-          <a:p>
+              <a:t>.</a:t>
+            </a:r>
             <a:endParaRPr lang="ru-RU" dirty="0"/>
           </a:p>
         </p:txBody>
@@ -5060,6 +5350,13 @@
   <p:clrMapOvr>
     <a:masterClrMapping/>
   </p:clrMapOvr>
+  <p:timing>
+    <p:tnLst>
+      <p:par>
+        <p:cTn id="1" dur="indefinite" restart="never" nodeType="tmRoot"/>
+      </p:par>
+    </p:tnLst>
+  </p:timing>
 </p:sld>
 </file>
 
@@ -5097,30 +5394,7 @@
           <a:p>
             <a:r>
               <a:rPr lang="ru-RU" dirty="0" smtClean="0"/>
-              <a:t>Заключение</a:t>
-            </a:r>
-            <a:endParaRPr lang="ru-RU" dirty="0"/>
-          </a:p>
-        </p:txBody>
-      </p:sp>
-      <p:sp>
-        <p:nvSpPr>
-          <p:cNvPr id="3" name="Содержимое 2"/>
-          <p:cNvSpPr>
-            <a:spLocks noGrp="1"/>
-          </p:cNvSpPr>
-          <p:nvPr>
-            <p:ph idx="1"/>
-          </p:nvPr>
-        </p:nvSpPr>
-        <p:spPr/>
-        <p:txBody>
-          <a:bodyPr/>
-          <a:lstStyle/>
-          <a:p>
-            <a:r>
-              <a:rPr lang="ru-RU" dirty="0" smtClean="0"/>
-              <a:t>В ходе выполнения ВКР на данный момент работа была выполнена частично. Требуется отладка печатных плат и загрузка программного кода в микроконтроллеры.</a:t>
+              <a:t>Аппаратная часть</a:t>
             </a:r>
             <a:endParaRPr lang="ru-RU" dirty="0"/>
           </a:p>
@@ -5150,11 +5424,386 @@
           </a:p>
         </p:txBody>
       </p:sp>
+      <p:sp>
+        <p:nvSpPr>
+          <p:cNvPr id="6" name="TextBox 5"/>
+          <p:cNvSpPr txBox="1"/>
+          <p:nvPr/>
+        </p:nvSpPr>
+        <p:spPr>
+          <a:xfrm>
+            <a:off x="2209800" y="4171950"/>
+            <a:ext cx="4742709" cy="646331"/>
+          </a:xfrm>
+          <a:prstGeom prst="rect">
+            <a:avLst/>
+          </a:prstGeom>
+          <a:noFill/>
+        </p:spPr>
+        <p:txBody>
+          <a:bodyPr wrap="none" rtlCol="0">
+            <a:spAutoFit/>
+          </a:bodyPr>
+          <a:lstStyle/>
+          <a:p>
+            <a:pPr algn="ctr"/>
+            <a:r>
+              <a:rPr lang="ru-RU" dirty="0" smtClean="0"/>
+              <a:t>Схема </a:t>
+            </a:r>
+            <a:r>
+              <a:rPr lang="ru-RU" dirty="0" smtClean="0"/>
+              <a:t>делителя напряжения с конденсатором</a:t>
+            </a:r>
+          </a:p>
+          <a:p>
+            <a:pPr algn="ctr"/>
+            <a:r>
+              <a:rPr lang="ru-RU" dirty="0" smtClean="0"/>
+              <a:t> для отсечения постоянной составляющей</a:t>
+            </a:r>
+            <a:endParaRPr lang="ru-RU" dirty="0"/>
+          </a:p>
+        </p:txBody>
+      </p:sp>
+      <p:pic>
+        <p:nvPicPr>
+          <p:cNvPr id="8" name="Рисунок 7"/>
+          <p:cNvPicPr/>
+          <p:nvPr/>
+        </p:nvPicPr>
+        <p:blipFill>
+          <a:blip r:embed="rId2"/>
+          <a:srcRect/>
+          <a:stretch>
+            <a:fillRect/>
+          </a:stretch>
+        </p:blipFill>
+        <p:spPr bwMode="auto">
+          <a:xfrm>
+            <a:off x="2281237" y="966787"/>
+            <a:ext cx="4581525" cy="3209925"/>
+          </a:xfrm>
+          <a:prstGeom prst="rect">
+            <a:avLst/>
+          </a:prstGeom>
+          <a:noFill/>
+          <a:ln w="9525">
+            <a:noFill/>
+            <a:miter lim="800000"/>
+            <a:headEnd/>
+            <a:tailEnd/>
+          </a:ln>
+        </p:spPr>
+      </p:pic>
     </p:spTree>
   </p:cSld>
   <p:clrMapOvr>
     <a:masterClrMapping/>
   </p:clrMapOvr>
+  <p:timing>
+    <p:tnLst>
+      <p:par>
+        <p:cTn id="1" dur="indefinite" restart="never" nodeType="tmRoot"/>
+      </p:par>
+    </p:tnLst>
+  </p:timing>
+</p:sld>
+</file>
+
+<file path=ppt/slides/slide18.xml><?xml version="1.0" encoding="utf-8"?>
+<p:sld xmlns:a="http://schemas.openxmlformats.org/drawingml/2006/main" xmlns:r="http://schemas.openxmlformats.org/officeDocument/2006/relationships" xmlns:p="http://schemas.openxmlformats.org/presentationml/2006/main">
+  <p:cSld>
+    <p:spTree>
+      <p:nvGrpSpPr>
+        <p:cNvPr id="1" name=""/>
+        <p:cNvGrpSpPr/>
+        <p:nvPr/>
+      </p:nvGrpSpPr>
+      <p:grpSpPr>
+        <a:xfrm>
+          <a:off x="0" y="0"/>
+          <a:ext cx="0" cy="0"/>
+          <a:chOff x="0" y="0"/>
+          <a:chExt cx="0" cy="0"/>
+        </a:xfrm>
+      </p:grpSpPr>
+      <p:sp>
+        <p:nvSpPr>
+          <p:cNvPr id="2" name="Заголовок 1"/>
+          <p:cNvSpPr>
+            <a:spLocks noGrp="1"/>
+          </p:cNvSpPr>
+          <p:nvPr>
+            <p:ph type="title"/>
+          </p:nvPr>
+        </p:nvSpPr>
+        <p:spPr/>
+        <p:txBody>
+          <a:bodyPr/>
+          <a:lstStyle/>
+          <a:p>
+            <a:r>
+              <a:rPr lang="ru-RU" dirty="0" smtClean="0"/>
+              <a:t>Аппаратная часть</a:t>
+            </a:r>
+            <a:endParaRPr lang="ru-RU" dirty="0"/>
+          </a:p>
+        </p:txBody>
+      </p:sp>
+      <p:sp>
+        <p:nvSpPr>
+          <p:cNvPr id="4" name="Номер слайда 3"/>
+          <p:cNvSpPr>
+            <a:spLocks noGrp="1"/>
+          </p:cNvSpPr>
+          <p:nvPr>
+            <p:ph type="sldNum" sz="quarter" idx="12"/>
+          </p:nvPr>
+        </p:nvSpPr>
+        <p:spPr/>
+        <p:txBody>
+          <a:bodyPr/>
+          <a:lstStyle/>
+          <a:p>
+            <a:fld id="{A483448D-3A78-4528-A469-B745A65DA480}" type="slidenum">
+              <a:rPr lang="en-US" smtClean="0"/>
+              <a:pPr/>
+              <a:t>18</a:t>
+            </a:fld>
+            <a:endParaRPr lang="en-US"/>
+          </a:p>
+        </p:txBody>
+      </p:sp>
+      <p:sp>
+        <p:nvSpPr>
+          <p:cNvPr id="6" name="TextBox 5"/>
+          <p:cNvSpPr txBox="1"/>
+          <p:nvPr/>
+        </p:nvSpPr>
+        <p:spPr>
+          <a:xfrm>
+            <a:off x="2667000" y="3943350"/>
+            <a:ext cx="3637984" cy="369332"/>
+          </a:xfrm>
+          <a:prstGeom prst="rect">
+            <a:avLst/>
+          </a:prstGeom>
+          <a:noFill/>
+        </p:spPr>
+        <p:txBody>
+          <a:bodyPr wrap="none" rtlCol="0">
+            <a:spAutoFit/>
+          </a:bodyPr>
+          <a:lstStyle/>
+          <a:p>
+            <a:r>
+              <a:rPr lang="ru-RU" dirty="0" smtClean="0"/>
+              <a:t>Итоговая схема приёмной </a:t>
+            </a:r>
+            <a:r>
+              <a:rPr lang="ru-RU" dirty="0" smtClean="0"/>
+              <a:t>стороны</a:t>
+            </a:r>
+            <a:endParaRPr lang="ru-RU" dirty="0"/>
+          </a:p>
+        </p:txBody>
+      </p:sp>
+      <p:pic>
+        <p:nvPicPr>
+          <p:cNvPr id="8" name="Рисунок 7" descr="Без имени2.png"/>
+          <p:cNvPicPr/>
+          <p:nvPr/>
+        </p:nvPicPr>
+        <p:blipFill>
+          <a:blip r:embed="rId2"/>
+          <a:stretch>
+            <a:fillRect/>
+          </a:stretch>
+        </p:blipFill>
+        <p:spPr>
+          <a:xfrm>
+            <a:off x="1601787" y="1129030"/>
+            <a:ext cx="5940425" cy="2885440"/>
+          </a:xfrm>
+          <a:prstGeom prst="rect">
+            <a:avLst/>
+          </a:prstGeom>
+        </p:spPr>
+      </p:pic>
+    </p:spTree>
+  </p:cSld>
+  <p:clrMapOvr>
+    <a:masterClrMapping/>
+  </p:clrMapOvr>
+  <p:timing>
+    <p:tnLst>
+      <p:par>
+        <p:cTn id="1" dur="indefinite" restart="never" nodeType="tmRoot"/>
+      </p:par>
+    </p:tnLst>
+  </p:timing>
+</p:sld>
+</file>
+
+<file path=ppt/slides/slide19.xml><?xml version="1.0" encoding="utf-8"?>
+<p:sld xmlns:a="http://schemas.openxmlformats.org/drawingml/2006/main" xmlns:r="http://schemas.openxmlformats.org/officeDocument/2006/relationships" xmlns:p="http://schemas.openxmlformats.org/presentationml/2006/main">
+  <p:cSld>
+    <p:spTree>
+      <p:nvGrpSpPr>
+        <p:cNvPr id="1" name=""/>
+        <p:cNvGrpSpPr/>
+        <p:nvPr/>
+      </p:nvGrpSpPr>
+      <p:grpSpPr>
+        <a:xfrm>
+          <a:off x="0" y="0"/>
+          <a:ext cx="0" cy="0"/>
+          <a:chOff x="0" y="0"/>
+          <a:chExt cx="0" cy="0"/>
+        </a:xfrm>
+      </p:grpSpPr>
+      <p:sp>
+        <p:nvSpPr>
+          <p:cNvPr id="2" name="Заголовок 1"/>
+          <p:cNvSpPr>
+            <a:spLocks noGrp="1"/>
+          </p:cNvSpPr>
+          <p:nvPr>
+            <p:ph type="title"/>
+          </p:nvPr>
+        </p:nvSpPr>
+        <p:spPr/>
+        <p:txBody>
+          <a:bodyPr/>
+          <a:lstStyle/>
+          <a:p>
+            <a:r>
+              <a:rPr lang="ru-RU" dirty="0" smtClean="0"/>
+              <a:t>Программная часть</a:t>
+            </a:r>
+            <a:endParaRPr lang="ru-RU" dirty="0"/>
+          </a:p>
+        </p:txBody>
+      </p:sp>
+      <p:sp>
+        <p:nvSpPr>
+          <p:cNvPr id="3" name="Содержимое 2"/>
+          <p:cNvSpPr>
+            <a:spLocks noGrp="1"/>
+          </p:cNvSpPr>
+          <p:nvPr>
+            <p:ph idx="1"/>
+          </p:nvPr>
+        </p:nvSpPr>
+        <p:spPr/>
+        <p:txBody>
+          <a:bodyPr>
+            <a:normAutofit lnSpcReduction="10000"/>
+          </a:bodyPr>
+          <a:lstStyle/>
+          <a:p>
+            <a:pPr algn="just"/>
+            <a:r>
+              <a:rPr lang="ru-RU" dirty="0" smtClean="0"/>
+              <a:t>Написание программного кода осуществлялось в среде разработки </a:t>
+            </a:r>
+            <a:r>
+              <a:rPr lang="en-US" dirty="0" err="1" smtClean="0"/>
+              <a:t>ArduinoIDE</a:t>
+            </a:r>
+            <a:r>
+              <a:rPr lang="en-US" dirty="0" smtClean="0"/>
+              <a:t> </a:t>
+            </a:r>
+            <a:r>
+              <a:rPr lang="ru-RU" dirty="0" smtClean="0"/>
+              <a:t>с использованием библиотек </a:t>
+            </a:r>
+            <a:r>
+              <a:rPr lang="en-US" dirty="0" err="1" smtClean="0"/>
+              <a:t>SPI.h</a:t>
+            </a:r>
+            <a:r>
+              <a:rPr lang="ru-RU" dirty="0" smtClean="0"/>
+              <a:t> и </a:t>
+            </a:r>
+            <a:r>
+              <a:rPr lang="en-US" dirty="0" smtClean="0"/>
+              <a:t>RF24.h</a:t>
+            </a:r>
+            <a:r>
+              <a:rPr lang="ru-RU" dirty="0" smtClean="0"/>
+              <a:t> для работы с радио модулем по интерфейсу </a:t>
+            </a:r>
+            <a:r>
+              <a:rPr lang="en-US" dirty="0" smtClean="0"/>
+              <a:t>SPI</a:t>
+            </a:r>
+            <a:r>
+              <a:rPr lang="ru-RU" dirty="0" smtClean="0"/>
+              <a:t>, а также библиотеки с ресурса </a:t>
+            </a:r>
+            <a:r>
+              <a:rPr lang="en-US" dirty="0" smtClean="0"/>
+              <a:t>STM32duino</a:t>
+            </a:r>
+            <a:r>
+              <a:rPr lang="ru-RU" dirty="0" smtClean="0"/>
+              <a:t> для работы с микроконтроллерами </a:t>
+            </a:r>
+            <a:r>
+              <a:rPr lang="en-US" dirty="0" smtClean="0"/>
+              <a:t>STM32.</a:t>
+            </a:r>
+          </a:p>
+          <a:p>
+            <a:endParaRPr lang="en-US" dirty="0" smtClean="0"/>
+          </a:p>
+          <a:p>
+            <a:endParaRPr lang="en-US" dirty="0" smtClean="0"/>
+          </a:p>
+          <a:p>
+            <a:endParaRPr lang="ru-RU" dirty="0"/>
+          </a:p>
+        </p:txBody>
+      </p:sp>
+      <p:sp>
+        <p:nvSpPr>
+          <p:cNvPr id="4" name="Номер слайда 3"/>
+          <p:cNvSpPr>
+            <a:spLocks noGrp="1"/>
+          </p:cNvSpPr>
+          <p:nvPr>
+            <p:ph type="sldNum" sz="quarter" idx="12"/>
+          </p:nvPr>
+        </p:nvSpPr>
+        <p:spPr/>
+        <p:txBody>
+          <a:bodyPr/>
+          <a:lstStyle/>
+          <a:p>
+            <a:fld id="{A483448D-3A78-4528-A469-B745A65DA480}" type="slidenum">
+              <a:rPr lang="en-US" smtClean="0"/>
+              <a:pPr/>
+              <a:t>19</a:t>
+            </a:fld>
+            <a:endParaRPr lang="en-US"/>
+          </a:p>
+        </p:txBody>
+      </p:sp>
+    </p:spTree>
+  </p:cSld>
+  <p:clrMapOvr>
+    <a:masterClrMapping/>
+  </p:clrMapOvr>
+  <p:timing>
+    <p:tnLst>
+      <p:par>
+        <p:cTn id="1" dur="indefinite" restart="never" nodeType="tmRoot"/>
+      </p:par>
+    </p:tnLst>
+  </p:timing>
 </p:sld>
 </file>
 
@@ -5215,17 +5864,10 @@
           </a:bodyPr>
           <a:lstStyle/>
           <a:p>
+            <a:pPr algn="just"/>
             <a:r>
               <a:rPr lang="ru-RU" dirty="0" smtClean="0"/>
-              <a:t>В современной индустрии профессионального звукового оборудования наблюдается устойчивая тенденция к отказу от кабельных соединений в пользу беспроводных радиосистем. Это обусловлено потребностью музыкантов в свободе передвижения на сцене и упрощением коммутации оборудования. Однако обеспечение надежной, высококачественной и с </a:t>
-            </a:r>
-            <a:r>
-              <a:rPr lang="ru-RU" smtClean="0"/>
-              <a:t>низкой задержкой </a:t>
-            </a:r>
-            <a:r>
-              <a:rPr lang="ru-RU" dirty="0" smtClean="0"/>
-              <a:t>передачи </a:t>
+              <a:t>В современной индустрии профессионального звукового оборудования наблюдается устойчивая тенденция к отказу от кабельных соединений в пользу беспроводных радиосистем. Это обусловлено потребностью музыкантов в свободе передвижения на сцене и упрощением коммутации оборудования. Однако обеспечение надежной, высококачественной и с низкой задержкой передачи </a:t>
             </a:r>
             <a:r>
               <a:rPr lang="ru-RU" dirty="0" err="1" smtClean="0"/>
@@ -5258,6 +5900,119 @@
               <a:rPr lang="en-US" smtClean="0"/>
               <a:pPr/>
               <a:t>2</a:t>
+            </a:fld>
+            <a:endParaRPr lang="en-US"/>
+          </a:p>
+        </p:txBody>
+      </p:sp>
+    </p:spTree>
+  </p:cSld>
+  <p:clrMapOvr>
+    <a:masterClrMapping/>
+  </p:clrMapOvr>
+  <p:timing>
+    <p:tnLst>
+      <p:par>
+        <p:cTn id="1" dur="indefinite" restart="never" nodeType="tmRoot"/>
+      </p:par>
+    </p:tnLst>
+  </p:timing>
+</p:sld>
+</file>
+
+<file path=ppt/slides/slide20.xml><?xml version="1.0" encoding="utf-8"?>
+<p:sld xmlns:a="http://schemas.openxmlformats.org/drawingml/2006/main" xmlns:r="http://schemas.openxmlformats.org/officeDocument/2006/relationships" xmlns:p="http://schemas.openxmlformats.org/presentationml/2006/main">
+  <p:cSld>
+    <p:spTree>
+      <p:nvGrpSpPr>
+        <p:cNvPr id="1" name=""/>
+        <p:cNvGrpSpPr/>
+        <p:nvPr/>
+      </p:nvGrpSpPr>
+      <p:grpSpPr>
+        <a:xfrm>
+          <a:off x="0" y="0"/>
+          <a:ext cx="0" cy="0"/>
+          <a:chOff x="0" y="0"/>
+          <a:chExt cx="0" cy="0"/>
+        </a:xfrm>
+      </p:grpSpPr>
+      <p:sp>
+        <p:nvSpPr>
+          <p:cNvPr id="2" name="Заголовок 1"/>
+          <p:cNvSpPr>
+            <a:spLocks noGrp="1"/>
+          </p:cNvSpPr>
+          <p:nvPr>
+            <p:ph type="title"/>
+          </p:nvPr>
+        </p:nvSpPr>
+        <p:spPr/>
+        <p:txBody>
+          <a:bodyPr/>
+          <a:lstStyle/>
+          <a:p>
+            <a:r>
+              <a:rPr lang="ru-RU" dirty="0" smtClean="0"/>
+              <a:t>Заключение</a:t>
+            </a:r>
+            <a:endParaRPr lang="ru-RU" dirty="0"/>
+          </a:p>
+        </p:txBody>
+      </p:sp>
+      <p:sp>
+        <p:nvSpPr>
+          <p:cNvPr id="3" name="Содержимое 2"/>
+          <p:cNvSpPr>
+            <a:spLocks noGrp="1"/>
+          </p:cNvSpPr>
+          <p:nvPr>
+            <p:ph idx="1"/>
+          </p:nvPr>
+        </p:nvSpPr>
+        <p:spPr/>
+        <p:txBody>
+          <a:bodyPr>
+            <a:normAutofit fontScale="92500" lnSpcReduction="10000"/>
+          </a:bodyPr>
+          <a:lstStyle/>
+          <a:p>
+            <a:pPr algn="just"/>
+            <a:r>
+              <a:rPr lang="ru-RU" dirty="0" smtClean="0"/>
+              <a:t>Рассмотрев основные аспекты гитарной радиосистемы, а также различные методы аналоговой и цифровой передачи сигнала по радио каналу, можно сделать вывод, что цифровой метод передачи является наиболее оптимальным и простым в аппаратной реализации, однако имеет ряд проблем при разработке программной </a:t>
+            </a:r>
+            <a:r>
+              <a:rPr lang="ru-RU" smtClean="0"/>
+              <a:t>части</a:t>
+            </a:r>
+            <a:r>
+              <a:rPr lang="ru-RU" smtClean="0"/>
+              <a:t>.</a:t>
+            </a:r>
+            <a:endParaRPr lang="ru-RU" smtClean="0"/>
+          </a:p>
+        </p:txBody>
+      </p:sp>
+      <p:sp>
+        <p:nvSpPr>
+          <p:cNvPr id="4" name="Номер слайда 3"/>
+          <p:cNvSpPr>
+            <a:spLocks noGrp="1"/>
+          </p:cNvSpPr>
+          <p:nvPr>
+            <p:ph type="sldNum" sz="quarter" idx="12"/>
+          </p:nvPr>
+        </p:nvSpPr>
+        <p:spPr/>
+        <p:txBody>
+          <a:bodyPr/>
+          <a:lstStyle/>
+          <a:p>
+            <a:fld id="{A483448D-3A78-4528-A469-B745A65DA480}" type="slidenum">
+              <a:rPr lang="en-US" smtClean="0"/>
+              <a:pPr/>
+              <a:t>20</a:t>
             </a:fld>
             <a:endParaRPr lang="en-US"/>
           </a:p>
@@ -5335,6 +6090,7 @@
           </a:bodyPr>
           <a:lstStyle/>
           <a:p>
+            <a:pPr algn="just"/>
             <a:r>
               <a:rPr lang="ru-RU" sz="2000" b="1" dirty="0" smtClean="0"/>
               <a:t>Цель</a:t>
@@ -5345,7 +6101,7 @@
             </a:r>
           </a:p>
           <a:p>
-            <a:pPr>
+            <a:pPr algn="just">
               <a:buNone/>
             </a:pPr>
             <a:r>
@@ -5354,7 +6110,7 @@
             </a:r>
           </a:p>
           <a:p>
-            <a:pPr marL="514350" indent="-514350">
+            <a:pPr marL="514350" indent="-514350" algn="just">
               <a:buFont typeface="+mj-lt"/>
               <a:buAutoNum type="arabicPeriod"/>
             </a:pPr>
@@ -5364,7 +6120,7 @@
             </a:r>
           </a:p>
           <a:p>
-            <a:pPr marL="514350" indent="-514350">
+            <a:pPr marL="514350" indent="-514350" algn="just">
               <a:buFont typeface="+mj-lt"/>
               <a:buAutoNum type="arabicPeriod"/>
             </a:pPr>
@@ -5374,7 +6130,7 @@
             </a:r>
           </a:p>
           <a:p>
-            <a:pPr marL="514350" indent="-514350">
+            <a:pPr marL="514350" indent="-514350" algn="just">
               <a:buFont typeface="+mj-lt"/>
               <a:buAutoNum type="arabicPeriod"/>
             </a:pPr>
@@ -5389,7 +6145,7 @@
             <a:endParaRPr lang="ru-RU" sz="2000" dirty="0" smtClean="0"/>
           </a:p>
           <a:p>
-            <a:pPr marL="514350" indent="-514350"/>
+            <a:pPr marL="514350" indent="-514350" algn="just"/>
             <a:r>
               <a:rPr lang="ru-RU" sz="2000" dirty="0" smtClean="0"/>
               <a:t>Объекты работы: микроконтроллер </a:t>
@@ -5428,7 +6184,7 @@
             </a:r>
           </a:p>
           <a:p>
-            <a:pPr marL="514350" indent="-514350"/>
+            <a:pPr marL="514350" indent="-514350" algn="just"/>
             <a:r>
               <a:rPr lang="ru-RU" sz="2000" dirty="0" smtClean="0"/>
               <a:t>Предмет работы: изучение передачи и приёма цифрового сигнала с частотной модуляцией </a:t>
@@ -5470,6 +6226,13 @@
   <p:clrMapOvr>
     <a:masterClrMapping/>
   </p:clrMapOvr>
+  <p:timing>
+    <p:tnLst>
+      <p:par>
+        <p:cTn id="1" dur="indefinite" restart="never" nodeType="tmRoot"/>
+      </p:par>
+    </p:tnLst>
+  </p:timing>
 </p:sld>
 </file>
 
@@ -5534,32 +6297,21 @@
           </a:bodyPr>
           <a:lstStyle/>
           <a:p>
+            <a:pPr algn="just"/>
             <a:r>
               <a:rPr lang="en-US" dirty="0" smtClean="0"/>
-              <a:t>GFSK (</a:t>
-            </a:r>
-            <a:r>
-              <a:rPr lang="en-US" dirty="0" smtClean="0"/>
-              <a:t>Gaussian Frequency Shift </a:t>
-            </a:r>
-            <a:r>
-              <a:rPr lang="en-US" dirty="0" smtClean="0"/>
-              <a:t>Keying) – </a:t>
+              <a:t>GFSK (Gaussian Frequency Shift Keying) – </a:t>
             </a:r>
             <a:r>
               <a:rPr lang="ru-RU" dirty="0" smtClean="0"/>
               <a:t>это вид частотной манипуляции (модуляции), при которой используется фильтр Гаусса для сглаживания частотных перестроек при изменении значения информационного символа. </a:t>
             </a:r>
-            <a:endParaRPr lang="ru-RU" dirty="0" smtClean="0"/>
-          </a:p>
-          <a:p>
+          </a:p>
+          <a:p>
+            <a:pPr algn="just"/>
             <a:r>
               <a:rPr lang="ru-RU" dirty="0" smtClean="0"/>
-              <a:t>Это </a:t>
-            </a:r>
-            <a:r>
-              <a:rPr lang="ru-RU" dirty="0" smtClean="0"/>
-              <a:t>позволяет уменьшить ширину спектра сигнала и повысить спектральную эффективность по сравнению с традиционной частотной манипуляцией (FSK).</a:t>
+              <a:t>Это позволяет уменьшить ширину спектра сигнала и повысить спектральную эффективность по сравнению с традиционной частотной манипуляцией (FSK).</a:t>
             </a:r>
             <a:endParaRPr lang="ru-RU" dirty="0"/>
           </a:p>
@@ -5594,6 +6346,13 @@
   <p:clrMapOvr>
     <a:masterClrMapping/>
   </p:clrMapOvr>
+  <p:timing>
+    <p:tnLst>
+      <p:par>
+        <p:cTn id="1" dur="indefinite" restart="never" nodeType="tmRoot"/>
+      </p:par>
+    </p:tnLst>
+  </p:timing>
 </p:sld>
 </file>
 
@@ -5630,39 +6389,12 @@
           <a:lstStyle/>
           <a:p>
             <a:r>
+              <a:rPr lang="en-US" dirty="0" smtClean="0"/>
+              <a:t>GFSK</a:t>
+            </a:r>
+            <a:r>
               <a:rPr lang="ru-RU" dirty="0" smtClean="0"/>
-              <a:t>Практическая реализация</a:t>
-            </a:r>
-            <a:endParaRPr lang="ru-RU" dirty="0"/>
-          </a:p>
-        </p:txBody>
-      </p:sp>
-      <p:sp>
-        <p:nvSpPr>
-          <p:cNvPr id="3" name="Содержимое 2"/>
-          <p:cNvSpPr>
-            <a:spLocks noGrp="1"/>
-          </p:cNvSpPr>
-          <p:nvPr>
-            <p:ph idx="1"/>
-          </p:nvPr>
-        </p:nvSpPr>
-        <p:spPr/>
-        <p:txBody>
-          <a:bodyPr>
-            <a:normAutofit fontScale="85000" lnSpcReduction="20000"/>
-          </a:bodyPr>
-          <a:lstStyle/>
-          <a:p>
-            <a:r>
-              <a:rPr lang="ru-RU" dirty="0" smtClean="0"/>
-              <a:t>Для передачи сигнала электрогитары через радио модуль, требуется подать его на вход АЦП микроконтроллера. Предварительно сигнал требуется усилить и поднять среднее значение колебаний до половины рабочего напряжения микроконтроллера.</a:t>
-            </a:r>
-          </a:p>
-          <a:p>
-            <a:r>
-              <a:rPr lang="ru-RU" dirty="0" smtClean="0"/>
-              <a:t>Для этого была реализована схема усилителя и виртуальной земли на сдвоенном операционном усилителе TLV2372IDR.</a:t>
+              <a:t> модуляция</a:t>
             </a:r>
             <a:endParaRPr lang="ru-RU" dirty="0"/>
           </a:p>
@@ -5689,6 +6421,62 @@
               <a:t>5</a:t>
             </a:fld>
             <a:endParaRPr lang="en-US"/>
+          </a:p>
+        </p:txBody>
+      </p:sp>
+      <p:pic>
+        <p:nvPicPr>
+          <p:cNvPr id="1028" name="Picture 4" descr="Picture background"/>
+          <p:cNvPicPr>
+            <a:picLocks noChangeAspect="1" noChangeArrowheads="1"/>
+          </p:cNvPicPr>
+          <p:nvPr/>
+        </p:nvPicPr>
+        <p:blipFill>
+          <a:blip r:embed="rId2"/>
+          <a:srcRect/>
+          <a:stretch>
+            <a:fillRect/>
+          </a:stretch>
+        </p:blipFill>
+        <p:spPr bwMode="auto">
+          <a:xfrm>
+            <a:off x="2895600" y="1181002"/>
+            <a:ext cx="3276600" cy="2990948"/>
+          </a:xfrm>
+          <a:prstGeom prst="rect">
+            <a:avLst/>
+          </a:prstGeom>
+          <a:noFill/>
+        </p:spPr>
+      </p:pic>
+      <p:sp>
+        <p:nvSpPr>
+          <p:cNvPr id="7" name="TextBox 6"/>
+          <p:cNvSpPr txBox="1"/>
+          <p:nvPr/>
+        </p:nvSpPr>
+        <p:spPr>
+          <a:xfrm>
+            <a:off x="2449563" y="4248150"/>
+            <a:ext cx="4256037" cy="369332"/>
+          </a:xfrm>
+          <a:prstGeom prst="rect">
+            <a:avLst/>
+          </a:prstGeom>
+          <a:noFill/>
+        </p:spPr>
+        <p:txBody>
+          <a:bodyPr wrap="none" rtlCol="0">
+            <a:spAutoFit/>
+          </a:bodyPr>
+          <a:lstStyle/>
+          <a:p>
+            <a:r>
+              <a:rPr lang="ru-RU" dirty="0" smtClean="0"/>
+              <a:t>Частотная характеристика фильтра Гаусса</a:t>
+            </a:r>
+            <a:endParaRPr lang="ru-RU" dirty="0"/>
           </a:p>
         </p:txBody>
       </p:sp>
@@ -5697,6 +6485,13 @@
   <p:clrMapOvr>
     <a:masterClrMapping/>
   </p:clrMapOvr>
+  <p:timing>
+    <p:tnLst>
+      <p:par>
+        <p:cTn id="1" dur="indefinite" restart="never" nodeType="tmRoot"/>
+      </p:par>
+    </p:tnLst>
+  </p:timing>
 </p:sld>
 </file>
 
@@ -5729,6 +6524,118 @@
         </p:nvSpPr>
         <p:spPr/>
         <p:txBody>
+          <a:bodyPr/>
+          <a:lstStyle/>
+          <a:p>
+            <a:r>
+              <a:rPr lang="ru-RU" dirty="0" smtClean="0"/>
+              <a:t>Практическая реализация</a:t>
+            </a:r>
+            <a:endParaRPr lang="ru-RU" dirty="0"/>
+          </a:p>
+        </p:txBody>
+      </p:sp>
+      <p:sp>
+        <p:nvSpPr>
+          <p:cNvPr id="3" name="Содержимое 2"/>
+          <p:cNvSpPr>
+            <a:spLocks noGrp="1"/>
+          </p:cNvSpPr>
+          <p:nvPr>
+            <p:ph idx="1"/>
+          </p:nvPr>
+        </p:nvSpPr>
+        <p:spPr/>
+        <p:txBody>
+          <a:bodyPr>
+            <a:normAutofit fontScale="85000" lnSpcReduction="20000"/>
+          </a:bodyPr>
+          <a:lstStyle/>
+          <a:p>
+            <a:pPr algn="just"/>
+            <a:r>
+              <a:rPr lang="ru-RU" dirty="0" smtClean="0"/>
+              <a:t>Для передачи сигнала электрогитары через радио модуль, требуется подать его на вход АЦП микроконтроллера. Предварительно сигнал требуется усилить и поднять среднее значение колебаний до половины рабочего напряжения микроконтроллера.</a:t>
+            </a:r>
+          </a:p>
+          <a:p>
+            <a:pPr algn="just"/>
+            <a:r>
+              <a:rPr lang="ru-RU" dirty="0" smtClean="0"/>
+              <a:t>Для этого была реализована схема усилителя и виртуальной земли на сдвоенном операционном усилителе TLV2372IDR.</a:t>
+            </a:r>
+            <a:endParaRPr lang="ru-RU" dirty="0"/>
+          </a:p>
+        </p:txBody>
+      </p:sp>
+      <p:sp>
+        <p:nvSpPr>
+          <p:cNvPr id="4" name="Номер слайда 3"/>
+          <p:cNvSpPr>
+            <a:spLocks noGrp="1"/>
+          </p:cNvSpPr>
+          <p:nvPr>
+            <p:ph type="sldNum" sz="quarter" idx="12"/>
+          </p:nvPr>
+        </p:nvSpPr>
+        <p:spPr/>
+        <p:txBody>
+          <a:bodyPr/>
+          <a:lstStyle/>
+          <a:p>
+            <a:fld id="{A483448D-3A78-4528-A469-B745A65DA480}" type="slidenum">
+              <a:rPr lang="en-US" smtClean="0"/>
+              <a:pPr/>
+              <a:t>6</a:t>
+            </a:fld>
+            <a:endParaRPr lang="en-US"/>
+          </a:p>
+        </p:txBody>
+      </p:sp>
+    </p:spTree>
+  </p:cSld>
+  <p:clrMapOvr>
+    <a:masterClrMapping/>
+  </p:clrMapOvr>
+  <p:timing>
+    <p:tnLst>
+      <p:par>
+        <p:cTn id="1" dur="indefinite" restart="never" nodeType="tmRoot"/>
+      </p:par>
+    </p:tnLst>
+  </p:timing>
+</p:sld>
+</file>
+
+<file path=ppt/slides/slide7.xml><?xml version="1.0" encoding="utf-8"?>
+<p:sld xmlns:a="http://schemas.openxmlformats.org/drawingml/2006/main" xmlns:r="http://schemas.openxmlformats.org/officeDocument/2006/relationships" xmlns:p="http://schemas.openxmlformats.org/presentationml/2006/main">
+  <p:cSld>
+    <p:spTree>
+      <p:nvGrpSpPr>
+        <p:cNvPr id="1" name=""/>
+        <p:cNvGrpSpPr/>
+        <p:nvPr/>
+      </p:nvGrpSpPr>
+      <p:grpSpPr>
+        <a:xfrm>
+          <a:off x="0" y="0"/>
+          <a:ext cx="0" cy="0"/>
+          <a:chOff x="0" y="0"/>
+          <a:chExt cx="0" cy="0"/>
+        </a:xfrm>
+      </p:grpSpPr>
+      <p:sp>
+        <p:nvSpPr>
+          <p:cNvPr id="2" name="Заголовок 1"/>
+          <p:cNvSpPr>
+            <a:spLocks noGrp="1"/>
+          </p:cNvSpPr>
+          <p:nvPr>
+            <p:ph type="title"/>
+          </p:nvPr>
+        </p:nvSpPr>
+        <p:spPr/>
+        <p:txBody>
           <a:bodyPr>
             <a:normAutofit/>
           </a:bodyPr>
@@ -5760,7 +6667,7 @@
             <a:fld id="{A483448D-3A78-4528-A469-B745A65DA480}" type="slidenum">
               <a:rPr lang="en-US" smtClean="0"/>
               <a:pPr/>
-              <a:t>6</a:t>
+              <a:t>7</a:t>
             </a:fld>
             <a:endParaRPr lang="en-US"/>
           </a:p>
@@ -5784,7 +6691,7 @@
         </p:blipFill>
         <p:spPr>
           <a:xfrm>
-            <a:off x="381000" y="1428750"/>
+            <a:off x="381000" y="1463675"/>
             <a:ext cx="4419600" cy="2555875"/>
           </a:xfrm>
           <a:prstGeom prst="rect">
@@ -5830,7 +6737,7 @@
         </p:nvSpPr>
         <p:spPr>
           <a:xfrm>
-            <a:off x="609600" y="4248150"/>
+            <a:off x="899986" y="4248150"/>
             <a:ext cx="2757614" cy="369332"/>
           </a:xfrm>
           <a:prstGeom prst="rect">
@@ -5876,11 +6783,7 @@
           <a:p>
             <a:r>
               <a:rPr lang="ru-RU" dirty="0" smtClean="0"/>
-              <a:t>Схема </a:t>
-            </a:r>
-            <a:r>
-              <a:rPr lang="ru-RU" dirty="0" smtClean="0"/>
-              <a:t>инвертирующего ОУ.</a:t>
+              <a:t>Схема инвертирующего ОУ.</a:t>
             </a:r>
             <a:endParaRPr lang="ru-RU" dirty="0"/>
           </a:p>
@@ -5891,107 +6794,13 @@
   <p:clrMapOvr>
     <a:masterClrMapping/>
   </p:clrMapOvr>
-</p:sld>
-</file>
-
-<file path=ppt/slides/slide7.xml><?xml version="1.0" encoding="utf-8"?>
-<p:sld xmlns:a="http://schemas.openxmlformats.org/drawingml/2006/main" xmlns:r="http://schemas.openxmlformats.org/officeDocument/2006/relationships" xmlns:p="http://schemas.openxmlformats.org/presentationml/2006/main">
-  <p:cSld>
-    <p:spTree>
-      <p:nvGrpSpPr>
-        <p:cNvPr id="1" name=""/>
-        <p:cNvGrpSpPr/>
-        <p:nvPr/>
-      </p:nvGrpSpPr>
-      <p:grpSpPr>
-        <a:xfrm>
-          <a:off x="0" y="0"/>
-          <a:ext cx="0" cy="0"/>
-          <a:chOff x="0" y="0"/>
-          <a:chExt cx="0" cy="0"/>
-        </a:xfrm>
-      </p:grpSpPr>
-      <p:sp>
-        <p:nvSpPr>
-          <p:cNvPr id="2" name="Заголовок 1"/>
-          <p:cNvSpPr>
-            <a:spLocks noGrp="1"/>
-          </p:cNvSpPr>
-          <p:nvPr>
-            <p:ph type="title"/>
-          </p:nvPr>
-        </p:nvSpPr>
-        <p:spPr/>
-        <p:txBody>
-          <a:bodyPr/>
-          <a:lstStyle/>
-          <a:p>
-            <a:r>
-              <a:rPr lang="ru-RU" dirty="0" smtClean="0"/>
-              <a:t>Аппаратная часть</a:t>
-            </a:r>
-            <a:endParaRPr lang="ru-RU" dirty="0"/>
-          </a:p>
-        </p:txBody>
-      </p:sp>
-      <p:sp>
-        <p:nvSpPr>
-          <p:cNvPr id="3" name="Содержимое 2"/>
-          <p:cNvSpPr>
-            <a:spLocks noGrp="1"/>
-          </p:cNvSpPr>
-          <p:nvPr>
-            <p:ph idx="1"/>
-          </p:nvPr>
-        </p:nvSpPr>
-        <p:spPr/>
-        <p:txBody>
-          <a:bodyPr/>
-          <a:lstStyle/>
-          <a:p>
-            <a:r>
-              <a:rPr lang="ru-RU" dirty="0" smtClean="0"/>
-              <a:t>Также исходя из теоремы Котельникова, следует ограничить спектр входного сигнала. </a:t>
-            </a:r>
-          </a:p>
-          <a:p>
-            <a:r>
-              <a:rPr lang="ru-RU" dirty="0" smtClean="0"/>
-              <a:t>Для этого была реализована схема фильтра нижних частот Чебышёва 3-го порядка.</a:t>
-            </a:r>
-            <a:endParaRPr lang="ru-RU" dirty="0"/>
-          </a:p>
-        </p:txBody>
-      </p:sp>
-      <p:sp>
-        <p:nvSpPr>
-          <p:cNvPr id="4" name="Номер слайда 3"/>
-          <p:cNvSpPr>
-            <a:spLocks noGrp="1"/>
-          </p:cNvSpPr>
-          <p:nvPr>
-            <p:ph type="sldNum" sz="quarter" idx="12"/>
-          </p:nvPr>
-        </p:nvSpPr>
-        <p:spPr/>
-        <p:txBody>
-          <a:bodyPr/>
-          <a:lstStyle/>
-          <a:p>
-            <a:fld id="{A483448D-3A78-4528-A469-B745A65DA480}" type="slidenum">
-              <a:rPr lang="en-US" smtClean="0"/>
-              <a:pPr/>
-              <a:t>7</a:t>
-            </a:fld>
-            <a:endParaRPr lang="en-US"/>
-          </a:p>
-        </p:txBody>
-      </p:sp>
-    </p:spTree>
-  </p:cSld>
-  <p:clrMapOvr>
-    <a:masterClrMapping/>
-  </p:clrMapOvr>
+  <p:timing>
+    <p:tnLst>
+      <p:par>
+        <p:cTn id="1" dur="indefinite" restart="never" nodeType="tmRoot"/>
+      </p:par>
+    </p:tnLst>
+  </p:timing>
 </p:sld>
 </file>
 
@@ -6037,6 +6846,49 @@
       </p:sp>
       <p:sp>
         <p:nvSpPr>
+          <p:cNvPr id="3" name="Содержимое 2"/>
+          <p:cNvSpPr>
+            <a:spLocks noGrp="1"/>
+          </p:cNvSpPr>
+          <p:nvPr>
+            <p:ph idx="1"/>
+          </p:nvPr>
+        </p:nvSpPr>
+        <p:spPr/>
+        <p:txBody>
+          <a:bodyPr/>
+          <a:lstStyle/>
+          <a:p>
+            <a:pPr algn="just"/>
+            <a:r>
+              <a:rPr lang="ru-RU" dirty="0" smtClean="0"/>
+              <a:t>Также исходя из теоремы Котельникова, следует ограничить спектр входного сигнала. </a:t>
+            </a:r>
+          </a:p>
+          <a:p>
+            <a:pPr algn="just"/>
+            <a:r>
+              <a:rPr lang="ru-RU" dirty="0" smtClean="0"/>
+              <a:t>Для этого была реализована схема фильтра нижних частот </a:t>
+            </a:r>
+            <a:r>
+              <a:rPr lang="ru-RU" dirty="0" smtClean="0"/>
+              <a:t>по схеме </a:t>
+            </a:r>
+            <a:r>
+              <a:rPr lang="ru-RU" dirty="0" err="1" smtClean="0"/>
+              <a:t>Саллена-Ки</a:t>
+            </a:r>
+            <a:r>
+              <a:rPr lang="ru-RU" dirty="0" smtClean="0"/>
+              <a:t> 4-го порядка с частотой среза 15 кГц</a:t>
+            </a:r>
+            <a:endParaRPr lang="ru-RU" dirty="0"/>
+          </a:p>
+        </p:txBody>
+      </p:sp>
+      <p:sp>
+        <p:nvSpPr>
           <p:cNvPr id="4" name="Номер слайда 3"/>
           <p:cNvSpPr>
             <a:spLocks noGrp="1"/>
@@ -6056,74 +6908,6 @@
               <a:t>8</a:t>
             </a:fld>
             <a:endParaRPr lang="en-US"/>
-          </a:p>
-        </p:txBody>
-      </p:sp>
-      <p:pic>
-        <p:nvPicPr>
-          <p:cNvPr id="5" name="Содержимое 4"/>
-          <p:cNvPicPr>
-            <a:picLocks noGrp="1"/>
-          </p:cNvPicPr>
-          <p:nvPr>
-            <p:ph idx="1"/>
-          </p:nvPr>
-        </p:nvPicPr>
-        <p:blipFill>
-          <a:blip r:embed="rId2"/>
-          <a:srcRect/>
-          <a:stretch>
-            <a:fillRect/>
-          </a:stretch>
-        </p:blipFill>
-        <p:spPr bwMode="auto">
-          <a:xfrm>
-            <a:off x="1445416" y="1200150"/>
-            <a:ext cx="6326984" cy="2873823"/>
-          </a:xfrm>
-          <a:prstGeom prst="rect">
-            <a:avLst/>
-          </a:prstGeom>
-          <a:noFill/>
-          <a:ln w="9525">
-            <a:noFill/>
-            <a:miter lim="800000"/>
-            <a:headEnd/>
-            <a:tailEnd/>
-          </a:ln>
-        </p:spPr>
-      </p:pic>
-      <p:sp>
-        <p:nvSpPr>
-          <p:cNvPr id="6" name="TextBox 5"/>
-          <p:cNvSpPr txBox="1"/>
-          <p:nvPr/>
-        </p:nvSpPr>
-        <p:spPr>
-          <a:xfrm>
-            <a:off x="2362200" y="4171950"/>
-            <a:ext cx="4891596" cy="369332"/>
-          </a:xfrm>
-          <a:prstGeom prst="rect">
-            <a:avLst/>
-          </a:prstGeom>
-          <a:noFill/>
-        </p:spPr>
-        <p:txBody>
-          <a:bodyPr wrap="none" rtlCol="0">
-            <a:spAutoFit/>
-          </a:bodyPr>
-          <a:lstStyle/>
-          <a:p>
-            <a:r>
-              <a:rPr lang="ru-RU" dirty="0" smtClean="0"/>
-              <a:t>ФНЧ Чебышёва 3-го порядка на частоте 15 </a:t>
-            </a:r>
-            <a:r>
-              <a:rPr lang="ru-RU" dirty="0" smtClean="0"/>
-              <a:t>кГц</a:t>
-            </a:r>
-            <a:endParaRPr lang="ru-RU" dirty="0" smtClean="0"/>
           </a:p>
         </p:txBody>
       </p:sp>
@@ -6132,6 +6916,13 @@
   <p:clrMapOvr>
     <a:masterClrMapping/>
   </p:clrMapOvr>
+  <p:timing>
+    <p:tnLst>
+      <p:par>
+        <p:cTn id="1" dur="indefinite" restart="never" nodeType="tmRoot"/>
+      </p:par>
+    </p:tnLst>
+  </p:timing>
 </p:sld>
 </file>
 
@@ -6177,33 +6968,6 @@
       </p:sp>
       <p:sp>
         <p:nvSpPr>
-          <p:cNvPr id="3" name="Содержимое 2"/>
-          <p:cNvSpPr>
-            <a:spLocks noGrp="1"/>
-          </p:cNvSpPr>
-          <p:nvPr>
-            <p:ph idx="1"/>
-          </p:nvPr>
-        </p:nvSpPr>
-        <p:spPr/>
-        <p:txBody>
-          <a:bodyPr/>
-          <a:lstStyle/>
-          <a:p>
-            <a:r>
-              <a:rPr lang="ru-RU" dirty="0" smtClean="0"/>
-              <a:t>Передача данных между микроконтроллером и радио модулем происходит по интерфейсу </a:t>
-            </a:r>
-            <a:r>
-              <a:rPr lang="en-US" dirty="0" smtClean="0"/>
-              <a:t>SPI.</a:t>
-            </a:r>
-            <a:endParaRPr lang="ru-RU" dirty="0"/>
-          </a:p>
-        </p:txBody>
-      </p:sp>
-      <p:sp>
-        <p:nvSpPr>
           <p:cNvPr id="4" name="Номер слайда 3"/>
           <p:cNvSpPr>
             <a:spLocks noGrp="1"/>
@@ -6222,15 +6986,106 @@
               <a:pPr/>
               <a:t>9</a:t>
             </a:fld>
-            <a:endParaRPr lang="en-US"/>
-          </a:p>
-        </p:txBody>
-      </p:sp>
+            <a:endParaRPr lang="en-US" dirty="0"/>
+          </a:p>
+        </p:txBody>
+      </p:sp>
+      <p:sp>
+        <p:nvSpPr>
+          <p:cNvPr id="6" name="TextBox 5"/>
+          <p:cNvSpPr txBox="1"/>
+          <p:nvPr/>
+        </p:nvSpPr>
+        <p:spPr>
+          <a:xfrm>
+            <a:off x="1371600" y="4171950"/>
+            <a:ext cx="6304803" cy="369332"/>
+          </a:xfrm>
+          <a:prstGeom prst="rect">
+            <a:avLst/>
+          </a:prstGeom>
+          <a:noFill/>
+        </p:spPr>
+        <p:txBody>
+          <a:bodyPr wrap="none" rtlCol="0" anchor="b" anchorCtr="1">
+            <a:spAutoFit/>
+          </a:bodyPr>
+          <a:lstStyle/>
+          <a:p>
+            <a:pPr algn="ctr"/>
+            <a:r>
+              <a:rPr lang="ru-RU" dirty="0" smtClean="0"/>
+              <a:t>ФНЧ </a:t>
+            </a:r>
+            <a:r>
+              <a:rPr lang="ru-RU" dirty="0" smtClean="0"/>
+              <a:t>по схеме </a:t>
+            </a:r>
+            <a:r>
+              <a:rPr lang="ru-RU" dirty="0" err="1" smtClean="0"/>
+              <a:t>Саллена-Ки</a:t>
+            </a:r>
+            <a:r>
+              <a:rPr lang="ru-RU" dirty="0" smtClean="0"/>
+              <a:t> 4-го </a:t>
+            </a:r>
+            <a:r>
+              <a:rPr lang="ru-RU" dirty="0" smtClean="0"/>
+              <a:t>порядка </a:t>
+            </a:r>
+            <a:r>
+              <a:rPr lang="ru-RU" dirty="0" smtClean="0"/>
+              <a:t>с частотой среза 15 </a:t>
+            </a:r>
+            <a:r>
+              <a:rPr lang="ru-RU" dirty="0" smtClean="0"/>
+              <a:t>кГц</a:t>
+            </a:r>
+          </a:p>
+        </p:txBody>
+      </p:sp>
+      <p:pic>
+        <p:nvPicPr>
+          <p:cNvPr id="8" name="Рисунок 7"/>
+          <p:cNvPicPr/>
+          <p:nvPr/>
+        </p:nvPicPr>
+        <p:blipFill>
+          <a:blip r:embed="rId2"/>
+          <a:srcRect/>
+          <a:stretch>
+            <a:fillRect/>
+          </a:stretch>
+        </p:blipFill>
+        <p:spPr bwMode="auto">
+          <a:xfrm>
+            <a:off x="2209800" y="1074356"/>
+            <a:ext cx="4667250" cy="2994788"/>
+          </a:xfrm>
+          <a:prstGeom prst="rect">
+            <a:avLst/>
+          </a:prstGeom>
+          <a:noFill/>
+          <a:ln w="9525">
+            <a:noFill/>
+            <a:miter lim="800000"/>
+            <a:headEnd/>
+            <a:tailEnd/>
+          </a:ln>
+        </p:spPr>
+      </p:pic>
     </p:spTree>
   </p:cSld>
   <p:clrMapOvr>
     <a:masterClrMapping/>
   </p:clrMapOvr>
+  <p:timing>
+    <p:tnLst>
+      <p:par>
+        <p:cTn id="1" dur="indefinite" restart="never" nodeType="tmRoot"/>
+      </p:par>
+    </p:tnLst>
+  </p:timing>
 </p:sld>
 </file>
 
